--- a/outputs/StepByハッカソン/ロジック_スライド_完成.pptx
+++ b/outputs/StepByハッカソン/ロジック_スライド_完成.pptx
@@ -5,9 +5,9 @@
     <p:sldMasterId id="2147483648" r:id="rId1"/>
   </p:sldMasterIdLst>
   <p:sldIdLst>
-    <p:sldId id="256" r:id="rId7"/>
+    <p:sldId id="256" r:id="rId2"/>
   </p:sldIdLst>
-  <p:sldSz cx="18288000" cy="10287000" type="screen4x3"/>
+  <p:sldSz cx="18288000" cy="10287000"/>
   <p:notesSz cx="6858000" cy="9144000"/>
   <p:defaultTextStyle>
     <a:defPPr>
@@ -104,6 +104,22 @@
       </a:defRPr>
     </a:lvl9pPr>
   </p:defaultTextStyle>
+  <p:extLst>
+    <p:ext uri="{EFAFB233-063F-42B5-8137-9DF3F51BA10A}">
+      <p15:sldGuideLst xmlns:p15="http://schemas.microsoft.com/office/powerpoint/2012/main">
+        <p15:guide id="1" orient="horz" pos="2160">
+          <p15:clr>
+            <a:srgbClr val="A4A3A4"/>
+          </p15:clr>
+        </p15:guide>
+        <p15:guide id="2" pos="2880">
+          <p15:clr>
+            <a:srgbClr val="A4A3A4"/>
+          </p15:clr>
+        </p15:guide>
+      </p15:sldGuideLst>
+    </p:ext>
+  </p:extLst>
 </p:presentation>
 </file>
 
@@ -145,10 +161,9 @@
           <a:lstStyle/>
           <a:p>
             <a:r>
-              <a:rPr lang="en-US" smtClean="0"/>
+              <a:rPr lang="en-US"/>
               <a:t>Click to edit Master title style</a:t>
             </a:r>
-            <a:endParaRPr lang="en-US"/>
           </a:p>
         </p:txBody>
       </p:sp>
@@ -264,10 +279,9 @@
           </a:lstStyle>
           <a:p>
             <a:r>
-              <a:rPr lang="en-US" smtClean="0"/>
+              <a:rPr lang="en-US"/>
               <a:t>Click to edit Master subtitle style</a:t>
             </a:r>
-            <a:endParaRPr lang="en-US"/>
           </a:p>
         </p:txBody>
       </p:sp>
@@ -288,7 +302,7 @@
           <a:p>
             <a:fld id="{5BCAD085-E8A6-8845-BD4E-CB4CCA059FC4}" type="datetimeFigureOut">
               <a:rPr lang="en-US" smtClean="0"/>
-              <a:t>1/27/13</a:t>
+              <a:t>3/20/2026</a:t>
             </a:fld>
             <a:endParaRPr lang="en-US"/>
           </a:p>
@@ -382,10 +396,9 @@
           <a:lstStyle/>
           <a:p>
             <a:r>
-              <a:rPr lang="en-US" smtClean="0"/>
+              <a:rPr lang="en-US"/>
               <a:t>Click to edit Master title style</a:t>
             </a:r>
-            <a:endParaRPr lang="en-US"/>
           </a:p>
         </p:txBody>
       </p:sp>
@@ -406,38 +419,37 @@
           <a:p>
             <a:pPr lvl="0"/>
             <a:r>
-              <a:rPr lang="en-US" smtClean="0"/>
+              <a:rPr lang="en-US"/>
               <a:t>Click to edit Master text styles</a:t>
             </a:r>
           </a:p>
           <a:p>
             <a:pPr lvl="1"/>
             <a:r>
-              <a:rPr lang="en-US" smtClean="0"/>
+              <a:rPr lang="en-US"/>
               <a:t>Second level</a:t>
             </a:r>
           </a:p>
           <a:p>
             <a:pPr lvl="2"/>
             <a:r>
-              <a:rPr lang="en-US" smtClean="0"/>
+              <a:rPr lang="en-US"/>
               <a:t>Third level</a:t>
             </a:r>
           </a:p>
           <a:p>
             <a:pPr lvl="3"/>
             <a:r>
-              <a:rPr lang="en-US" smtClean="0"/>
+              <a:rPr lang="en-US"/>
               <a:t>Fourth level</a:t>
             </a:r>
           </a:p>
           <a:p>
             <a:pPr lvl="4"/>
             <a:r>
-              <a:rPr lang="en-US" smtClean="0"/>
+              <a:rPr lang="en-US"/>
               <a:t>Fifth level</a:t>
             </a:r>
-            <a:endParaRPr lang="en-US"/>
           </a:p>
         </p:txBody>
       </p:sp>
@@ -458,7 +470,7 @@
           <a:p>
             <a:fld id="{5BCAD085-E8A6-8845-BD4E-CB4CCA059FC4}" type="datetimeFigureOut">
               <a:rPr lang="en-US" smtClean="0"/>
-              <a:t>1/27/13</a:t>
+              <a:t>3/20/2026</a:t>
             </a:fld>
             <a:endParaRPr lang="en-US"/>
           </a:p>
@@ -557,10 +569,9 @@
           <a:lstStyle/>
           <a:p>
             <a:r>
-              <a:rPr lang="en-US" smtClean="0"/>
+              <a:rPr lang="en-US"/>
               <a:t>Click to edit Master title style</a:t>
             </a:r>
-            <a:endParaRPr lang="en-US"/>
           </a:p>
         </p:txBody>
       </p:sp>
@@ -586,38 +597,37 @@
           <a:p>
             <a:pPr lvl="0"/>
             <a:r>
-              <a:rPr lang="en-US" smtClean="0"/>
+              <a:rPr lang="en-US"/>
               <a:t>Click to edit Master text styles</a:t>
             </a:r>
           </a:p>
           <a:p>
             <a:pPr lvl="1"/>
             <a:r>
-              <a:rPr lang="en-US" smtClean="0"/>
+              <a:rPr lang="en-US"/>
               <a:t>Second level</a:t>
             </a:r>
           </a:p>
           <a:p>
             <a:pPr lvl="2"/>
             <a:r>
-              <a:rPr lang="en-US" smtClean="0"/>
+              <a:rPr lang="en-US"/>
               <a:t>Third level</a:t>
             </a:r>
           </a:p>
           <a:p>
             <a:pPr lvl="3"/>
             <a:r>
-              <a:rPr lang="en-US" smtClean="0"/>
+              <a:rPr lang="en-US"/>
               <a:t>Fourth level</a:t>
             </a:r>
           </a:p>
           <a:p>
             <a:pPr lvl="4"/>
             <a:r>
-              <a:rPr lang="en-US" smtClean="0"/>
+              <a:rPr lang="en-US"/>
               <a:t>Fifth level</a:t>
             </a:r>
-            <a:endParaRPr lang="en-US"/>
           </a:p>
         </p:txBody>
       </p:sp>
@@ -638,7 +648,7 @@
           <a:p>
             <a:fld id="{5BCAD085-E8A6-8845-BD4E-CB4CCA059FC4}" type="datetimeFigureOut">
               <a:rPr lang="en-US" smtClean="0"/>
-              <a:t>1/27/13</a:t>
+              <a:t>3/20/2026</a:t>
             </a:fld>
             <a:endParaRPr lang="en-US"/>
           </a:p>
@@ -732,10 +742,9 @@
           <a:lstStyle/>
           <a:p>
             <a:r>
-              <a:rPr lang="en-US" smtClean="0"/>
+              <a:rPr lang="en-US"/>
               <a:t>Click to edit Master title style</a:t>
             </a:r>
-            <a:endParaRPr lang="en-US"/>
           </a:p>
         </p:txBody>
       </p:sp>
@@ -756,38 +765,37 @@
           <a:p>
             <a:pPr lvl="0"/>
             <a:r>
-              <a:rPr lang="en-US" smtClean="0"/>
+              <a:rPr lang="en-US"/>
               <a:t>Click to edit Master text styles</a:t>
             </a:r>
           </a:p>
           <a:p>
             <a:pPr lvl="1"/>
             <a:r>
-              <a:rPr lang="en-US" smtClean="0"/>
+              <a:rPr lang="en-US"/>
               <a:t>Second level</a:t>
             </a:r>
           </a:p>
           <a:p>
             <a:pPr lvl="2"/>
             <a:r>
-              <a:rPr lang="en-US" smtClean="0"/>
+              <a:rPr lang="en-US"/>
               <a:t>Third level</a:t>
             </a:r>
           </a:p>
           <a:p>
             <a:pPr lvl="3"/>
             <a:r>
-              <a:rPr lang="en-US" smtClean="0"/>
+              <a:rPr lang="en-US"/>
               <a:t>Fourth level</a:t>
             </a:r>
           </a:p>
           <a:p>
             <a:pPr lvl="4"/>
             <a:r>
-              <a:rPr lang="en-US" smtClean="0"/>
+              <a:rPr lang="en-US"/>
               <a:t>Fifth level</a:t>
             </a:r>
-            <a:endParaRPr lang="en-US"/>
           </a:p>
         </p:txBody>
       </p:sp>
@@ -808,7 +816,7 @@
           <a:p>
             <a:fld id="{5BCAD085-E8A6-8845-BD4E-CB4CCA059FC4}" type="datetimeFigureOut">
               <a:rPr lang="en-US" smtClean="0"/>
-              <a:t>1/27/13</a:t>
+              <a:t>3/20/2026</a:t>
             </a:fld>
             <a:endParaRPr lang="en-US"/>
           </a:p>
@@ -911,10 +919,9 @@
           </a:lstStyle>
           <a:p>
             <a:r>
-              <a:rPr lang="en-US" smtClean="0"/>
+              <a:rPr lang="en-US"/>
               <a:t>Click to edit Master title style</a:t>
             </a:r>
-            <a:endParaRPr lang="en-US"/>
           </a:p>
         </p:txBody>
       </p:sp>
@@ -1031,7 +1038,7 @@
           <a:p>
             <a:pPr lvl="0"/>
             <a:r>
-              <a:rPr lang="en-US" smtClean="0"/>
+              <a:rPr lang="en-US"/>
               <a:t>Click to edit Master text styles</a:t>
             </a:r>
           </a:p>
@@ -1054,7 +1061,7 @@
           <a:p>
             <a:fld id="{5BCAD085-E8A6-8845-BD4E-CB4CCA059FC4}" type="datetimeFigureOut">
               <a:rPr lang="en-US" smtClean="0"/>
-              <a:t>1/27/13</a:t>
+              <a:t>3/20/2026</a:t>
             </a:fld>
             <a:endParaRPr lang="en-US"/>
           </a:p>
@@ -1148,10 +1155,9 @@
           <a:lstStyle/>
           <a:p>
             <a:r>
-              <a:rPr lang="en-US" smtClean="0"/>
+              <a:rPr lang="en-US"/>
               <a:t>Click to edit Master title style</a:t>
             </a:r>
-            <a:endParaRPr lang="en-US"/>
           </a:p>
         </p:txBody>
       </p:sp>
@@ -1205,38 +1211,37 @@
           <a:p>
             <a:pPr lvl="0"/>
             <a:r>
-              <a:rPr lang="en-US" smtClean="0"/>
+              <a:rPr lang="en-US"/>
               <a:t>Click to edit Master text styles</a:t>
             </a:r>
           </a:p>
           <a:p>
             <a:pPr lvl="1"/>
             <a:r>
-              <a:rPr lang="en-US" smtClean="0"/>
+              <a:rPr lang="en-US"/>
               <a:t>Second level</a:t>
             </a:r>
           </a:p>
           <a:p>
             <a:pPr lvl="2"/>
             <a:r>
-              <a:rPr lang="en-US" smtClean="0"/>
+              <a:rPr lang="en-US"/>
               <a:t>Third level</a:t>
             </a:r>
           </a:p>
           <a:p>
             <a:pPr lvl="3"/>
             <a:r>
-              <a:rPr lang="en-US" smtClean="0"/>
+              <a:rPr lang="en-US"/>
               <a:t>Fourth level</a:t>
             </a:r>
           </a:p>
           <a:p>
             <a:pPr lvl="4"/>
             <a:r>
-              <a:rPr lang="en-US" smtClean="0"/>
+              <a:rPr lang="en-US"/>
               <a:t>Fifth level</a:t>
             </a:r>
-            <a:endParaRPr lang="en-US"/>
           </a:p>
         </p:txBody>
       </p:sp>
@@ -1290,38 +1295,37 @@
           <a:p>
             <a:pPr lvl="0"/>
             <a:r>
-              <a:rPr lang="en-US" smtClean="0"/>
+              <a:rPr lang="en-US"/>
               <a:t>Click to edit Master text styles</a:t>
             </a:r>
           </a:p>
           <a:p>
             <a:pPr lvl="1"/>
             <a:r>
-              <a:rPr lang="en-US" smtClean="0"/>
+              <a:rPr lang="en-US"/>
               <a:t>Second level</a:t>
             </a:r>
           </a:p>
           <a:p>
             <a:pPr lvl="2"/>
             <a:r>
-              <a:rPr lang="en-US" smtClean="0"/>
+              <a:rPr lang="en-US"/>
               <a:t>Third level</a:t>
             </a:r>
           </a:p>
           <a:p>
             <a:pPr lvl="3"/>
             <a:r>
-              <a:rPr lang="en-US" smtClean="0"/>
+              <a:rPr lang="en-US"/>
               <a:t>Fourth level</a:t>
             </a:r>
           </a:p>
           <a:p>
             <a:pPr lvl="4"/>
             <a:r>
-              <a:rPr lang="en-US" smtClean="0"/>
+              <a:rPr lang="en-US"/>
               <a:t>Fifth level</a:t>
             </a:r>
-            <a:endParaRPr lang="en-US"/>
           </a:p>
         </p:txBody>
       </p:sp>
@@ -1342,7 +1346,7 @@
           <a:p>
             <a:fld id="{5BCAD085-E8A6-8845-BD4E-CB4CCA059FC4}" type="datetimeFigureOut">
               <a:rPr lang="en-US" smtClean="0"/>
-              <a:t>1/27/13</a:t>
+              <a:t>3/20/2026</a:t>
             </a:fld>
             <a:endParaRPr lang="en-US"/>
           </a:p>
@@ -1440,10 +1444,9 @@
           </a:lstStyle>
           <a:p>
             <a:r>
-              <a:rPr lang="en-US" smtClean="0"/>
+              <a:rPr lang="en-US"/>
               <a:t>Click to edit Master title style</a:t>
             </a:r>
-            <a:endParaRPr lang="en-US"/>
           </a:p>
         </p:txBody>
       </p:sp>
@@ -1506,7 +1509,7 @@
           <a:p>
             <a:pPr lvl="0"/>
             <a:r>
-              <a:rPr lang="en-US" smtClean="0"/>
+              <a:rPr lang="en-US"/>
               <a:t>Click to edit Master text styles</a:t>
             </a:r>
           </a:p>
@@ -1562,38 +1565,37 @@
           <a:p>
             <a:pPr lvl="0"/>
             <a:r>
-              <a:rPr lang="en-US" smtClean="0"/>
+              <a:rPr lang="en-US"/>
               <a:t>Click to edit Master text styles</a:t>
             </a:r>
           </a:p>
           <a:p>
             <a:pPr lvl="1"/>
             <a:r>
-              <a:rPr lang="en-US" smtClean="0"/>
+              <a:rPr lang="en-US"/>
               <a:t>Second level</a:t>
             </a:r>
           </a:p>
           <a:p>
             <a:pPr lvl="2"/>
             <a:r>
-              <a:rPr lang="en-US" smtClean="0"/>
+              <a:rPr lang="en-US"/>
               <a:t>Third level</a:t>
             </a:r>
           </a:p>
           <a:p>
             <a:pPr lvl="3"/>
             <a:r>
-              <a:rPr lang="en-US" smtClean="0"/>
+              <a:rPr lang="en-US"/>
               <a:t>Fourth level</a:t>
             </a:r>
           </a:p>
           <a:p>
             <a:pPr lvl="4"/>
             <a:r>
-              <a:rPr lang="en-US" smtClean="0"/>
+              <a:rPr lang="en-US"/>
               <a:t>Fifth level</a:t>
             </a:r>
-            <a:endParaRPr lang="en-US"/>
           </a:p>
         </p:txBody>
       </p:sp>
@@ -1656,7 +1658,7 @@
           <a:p>
             <a:pPr lvl="0"/>
             <a:r>
-              <a:rPr lang="en-US" smtClean="0"/>
+              <a:rPr lang="en-US"/>
               <a:t>Click to edit Master text styles</a:t>
             </a:r>
           </a:p>
@@ -1712,38 +1714,37 @@
           <a:p>
             <a:pPr lvl="0"/>
             <a:r>
-              <a:rPr lang="en-US" smtClean="0"/>
+              <a:rPr lang="en-US"/>
               <a:t>Click to edit Master text styles</a:t>
             </a:r>
           </a:p>
           <a:p>
             <a:pPr lvl="1"/>
             <a:r>
-              <a:rPr lang="en-US" smtClean="0"/>
+              <a:rPr lang="en-US"/>
               <a:t>Second level</a:t>
             </a:r>
           </a:p>
           <a:p>
             <a:pPr lvl="2"/>
             <a:r>
-              <a:rPr lang="en-US" smtClean="0"/>
+              <a:rPr lang="en-US"/>
               <a:t>Third level</a:t>
             </a:r>
           </a:p>
           <a:p>
             <a:pPr lvl="3"/>
             <a:r>
-              <a:rPr lang="en-US" smtClean="0"/>
+              <a:rPr lang="en-US"/>
               <a:t>Fourth level</a:t>
             </a:r>
           </a:p>
           <a:p>
             <a:pPr lvl="4"/>
             <a:r>
-              <a:rPr lang="en-US" smtClean="0"/>
+              <a:rPr lang="en-US"/>
               <a:t>Fifth level</a:t>
             </a:r>
-            <a:endParaRPr lang="en-US"/>
           </a:p>
         </p:txBody>
       </p:sp>
@@ -1764,7 +1765,7 @@
           <a:p>
             <a:fld id="{5BCAD085-E8A6-8845-BD4E-CB4CCA059FC4}" type="datetimeFigureOut">
               <a:rPr lang="en-US" smtClean="0"/>
-              <a:t>1/27/13</a:t>
+              <a:t>3/20/2026</a:t>
             </a:fld>
             <a:endParaRPr lang="en-US"/>
           </a:p>
@@ -1858,10 +1859,9 @@
           <a:lstStyle/>
           <a:p>
             <a:r>
-              <a:rPr lang="en-US" smtClean="0"/>
+              <a:rPr lang="en-US"/>
               <a:t>Click to edit Master title style</a:t>
             </a:r>
-            <a:endParaRPr lang="en-US"/>
           </a:p>
         </p:txBody>
       </p:sp>
@@ -1882,7 +1882,7 @@
           <a:p>
             <a:fld id="{5BCAD085-E8A6-8845-BD4E-CB4CCA059FC4}" type="datetimeFigureOut">
               <a:rPr lang="en-US" smtClean="0"/>
-              <a:t>1/27/13</a:t>
+              <a:t>3/20/2026</a:t>
             </a:fld>
             <a:endParaRPr lang="en-US"/>
           </a:p>
@@ -1977,7 +1977,7 @@
           <a:p>
             <a:fld id="{5BCAD085-E8A6-8845-BD4E-CB4CCA059FC4}" type="datetimeFigureOut">
               <a:rPr lang="en-US" smtClean="0"/>
-              <a:t>1/27/13</a:t>
+              <a:t>3/20/2026</a:t>
             </a:fld>
             <a:endParaRPr lang="en-US"/>
           </a:p>
@@ -2080,10 +2080,9 @@
           </a:lstStyle>
           <a:p>
             <a:r>
-              <a:rPr lang="en-US" smtClean="0"/>
+              <a:rPr lang="en-US"/>
               <a:t>Click to edit Master title style</a:t>
             </a:r>
-            <a:endParaRPr lang="en-US"/>
           </a:p>
         </p:txBody>
       </p:sp>
@@ -2137,38 +2136,37 @@
           <a:p>
             <a:pPr lvl="0"/>
             <a:r>
-              <a:rPr lang="en-US" smtClean="0"/>
+              <a:rPr lang="en-US"/>
               <a:t>Click to edit Master text styles</a:t>
             </a:r>
           </a:p>
           <a:p>
             <a:pPr lvl="1"/>
             <a:r>
-              <a:rPr lang="en-US" smtClean="0"/>
+              <a:rPr lang="en-US"/>
               <a:t>Second level</a:t>
             </a:r>
           </a:p>
           <a:p>
             <a:pPr lvl="2"/>
             <a:r>
-              <a:rPr lang="en-US" smtClean="0"/>
+              <a:rPr lang="en-US"/>
               <a:t>Third level</a:t>
             </a:r>
           </a:p>
           <a:p>
             <a:pPr lvl="3"/>
             <a:r>
-              <a:rPr lang="en-US" smtClean="0"/>
+              <a:rPr lang="en-US"/>
               <a:t>Fourth level</a:t>
             </a:r>
           </a:p>
           <a:p>
             <a:pPr lvl="4"/>
             <a:r>
-              <a:rPr lang="en-US" smtClean="0"/>
+              <a:rPr lang="en-US"/>
               <a:t>Fifth level</a:t>
             </a:r>
-            <a:endParaRPr lang="en-US"/>
           </a:p>
         </p:txBody>
       </p:sp>
@@ -2231,7 +2229,7 @@
           <a:p>
             <a:pPr lvl="0"/>
             <a:r>
-              <a:rPr lang="en-US" smtClean="0"/>
+              <a:rPr lang="en-US"/>
               <a:t>Click to edit Master text styles</a:t>
             </a:r>
           </a:p>
@@ -2254,7 +2252,7 @@
           <a:p>
             <a:fld id="{5BCAD085-E8A6-8845-BD4E-CB4CCA059FC4}" type="datetimeFigureOut">
               <a:rPr lang="en-US" smtClean="0"/>
-              <a:t>1/27/13</a:t>
+              <a:t>3/20/2026</a:t>
             </a:fld>
             <a:endParaRPr lang="en-US"/>
           </a:p>
@@ -2357,10 +2355,9 @@
           </a:lstStyle>
           <a:p>
             <a:r>
-              <a:rPr lang="en-US" smtClean="0"/>
+              <a:rPr lang="en-US"/>
               <a:t>Click to edit Master title style</a:t>
             </a:r>
-            <a:endParaRPr lang="en-US"/>
           </a:p>
         </p:txBody>
       </p:sp>
@@ -2484,7 +2481,7 @@
           <a:p>
             <a:pPr lvl="0"/>
             <a:r>
-              <a:rPr lang="en-US" smtClean="0"/>
+              <a:rPr lang="en-US"/>
               <a:t>Click to edit Master text styles</a:t>
             </a:r>
           </a:p>
@@ -2507,7 +2504,7 @@
           <a:p>
             <a:fld id="{5BCAD085-E8A6-8845-BD4E-CB4CCA059FC4}" type="datetimeFigureOut">
               <a:rPr lang="en-US" smtClean="0"/>
-              <a:t>1/27/13</a:t>
+              <a:t>3/20/2026</a:t>
             </a:fld>
             <a:endParaRPr lang="en-US"/>
           </a:p>
@@ -2616,10 +2613,9 @@
           <a:lstStyle/>
           <a:p>
             <a:r>
-              <a:rPr lang="en-US" smtClean="0"/>
+              <a:rPr lang="en-US"/>
               <a:t>Click to edit Master title style</a:t>
             </a:r>
-            <a:endParaRPr lang="en-US"/>
           </a:p>
         </p:txBody>
       </p:sp>
@@ -2650,38 +2646,37 @@
           <a:p>
             <a:pPr lvl="0"/>
             <a:r>
-              <a:rPr lang="en-US" smtClean="0"/>
+              <a:rPr lang="en-US"/>
               <a:t>Click to edit Master text styles</a:t>
             </a:r>
           </a:p>
           <a:p>
             <a:pPr lvl="1"/>
             <a:r>
-              <a:rPr lang="en-US" smtClean="0"/>
+              <a:rPr lang="en-US"/>
               <a:t>Second level</a:t>
             </a:r>
           </a:p>
           <a:p>
             <a:pPr lvl="2"/>
             <a:r>
-              <a:rPr lang="en-US" smtClean="0"/>
+              <a:rPr lang="en-US"/>
               <a:t>Third level</a:t>
             </a:r>
           </a:p>
           <a:p>
             <a:pPr lvl="3"/>
             <a:r>
-              <a:rPr lang="en-US" smtClean="0"/>
+              <a:rPr lang="en-US"/>
               <a:t>Fourth level</a:t>
             </a:r>
           </a:p>
           <a:p>
             <a:pPr lvl="4"/>
             <a:r>
-              <a:rPr lang="en-US" smtClean="0"/>
+              <a:rPr lang="en-US"/>
               <a:t>Fifth level</a:t>
             </a:r>
-            <a:endParaRPr lang="en-US"/>
           </a:p>
         </p:txBody>
       </p:sp>
@@ -2720,7 +2715,7 @@
           <a:p>
             <a:fld id="{5BCAD085-E8A6-8845-BD4E-CB4CCA059FC4}" type="datetimeFigureOut">
               <a:rPr lang="en-US" smtClean="0"/>
-              <a:t>1/27/13</a:t>
+              <a:t>3/20/2026</a:t>
             </a:fld>
             <a:endParaRPr lang="en-US"/>
           </a:p>
@@ -3079,7 +3074,7 @@
 </file>
 
 <file path=ppt/slides/slide1.xml><?xml version="1.0" encoding="utf-8"?>
-<p:sld xmlns:a="http://schemas.openxmlformats.org/drawingml/2006/main" xmlns:ns2="http://schemas.openxmlformats.org/officeDocument/2006/relationships" xmlns:ns3="http://schemas.microsoft.com/office/drawing/2016/SVG/main" xmlns:p="http://schemas.openxmlformats.org/presentationml/2006/main">
+<p:sld xmlns:a="http://schemas.openxmlformats.org/drawingml/2006/main" xmlns:r="http://schemas.openxmlformats.org/officeDocument/2006/relationships" xmlns:p="http://schemas.openxmlformats.org/presentationml/2006/main">
   <p:cSld>
     <p:spTree>
       <p:nvGrpSpPr>
@@ -3087,15 +3082,22 @@
         <p:cNvGrpSpPr/>
         <p:nvPr/>
       </p:nvGrpSpPr>
-      <p:grpSpPr/>
+      <p:grpSpPr>
+        <a:xfrm>
+          <a:off x="0" y="0"/>
+          <a:ext cx="0" cy="0"/>
+          <a:chOff x="0" y="0"/>
+          <a:chExt cx="0" cy="0"/>
+        </a:xfrm>
+      </p:grpSpPr>
       <p:grpSp>
         <p:nvGrpSpPr>
-          <p:cNvPr name="Group 2" id="1"/>
+          <p:cNvPr id="24" name="Group 2"/>
           <p:cNvGrpSpPr/>
           <p:nvPr/>
         </p:nvGrpSpPr>
         <p:grpSpPr>
-          <a:xfrm rot="0">
+          <a:xfrm>
             <a:off x="0" y="0"/>
             <a:ext cx="18288000" cy="1619250"/>
             <a:chOff x="0" y="0"/>
@@ -3104,12 +3106,12 @@
         </p:grpSpPr>
         <p:sp>
           <p:nvSpPr>
-            <p:cNvPr name="Freeform 3" id="2"/>
+            <p:cNvPr id="25" name="Freeform 3"/>
             <p:cNvSpPr/>
             <p:nvPr/>
           </p:nvSpPr>
           <p:spPr>
-            <a:xfrm flipH="false" flipV="false" rot="0">
+            <a:xfrm>
               <a:off x="0" y="0"/>
               <a:ext cx="4816592" cy="426469"/>
             </a:xfrm>
@@ -3118,9 +3120,9 @@
               <a:gdLst/>
               <a:ahLst/>
               <a:cxnLst/>
-              <a:rect r="r" b="b" t="t" l="l"/>
+              <a:rect l="l" t="t" r="r" b="b"/>
               <a:pathLst>
-                <a:path h="426469" w="4816592">
+                <a:path w="4816592" h="426469">
                   <a:moveTo>
                     <a:pt x="0" y="0"/>
                   </a:moveTo>
@@ -3141,11 +3143,18 @@
               <a:srgbClr val="262262"/>
             </a:solidFill>
           </p:spPr>
+          <p:txBody>
+            <a:bodyPr/>
+            <a:lstStyle/>
+            <a:p>
+              <a:endParaRPr lang="ja-JP" altLang="en-US"/>
+            </a:p>
+          </p:txBody>
         </p:sp>
         <p:sp>
           <p:nvSpPr>
-            <p:cNvPr name="TextBox 4" id="3"/>
-            <p:cNvSpPr txBox="true"/>
+            <p:cNvPr id="26" name="TextBox 4"/>
+            <p:cNvSpPr txBox="1"/>
             <p:nvPr/>
           </p:nvSpPr>
           <p:spPr>
@@ -3158,7 +3167,7 @@
             </a:prstGeom>
           </p:spPr>
           <p:txBody>
-            <a:bodyPr anchor="ctr" rtlCol="false" tIns="50800" lIns="50800" bIns="50800" rIns="50800"/>
+            <a:bodyPr lIns="50800" tIns="50800" rIns="50800" bIns="50800" rtlCol="0" anchor="ctr"/>
             <a:lstStyle/>
             <a:p>
               <a:pPr algn="ctr">
@@ -3166,6 +3175,7 @@
                   <a:spcPts val="3456"/>
                 </a:lnSpc>
               </a:pPr>
+              <a:endParaRPr/>
             </a:p>
           </p:txBody>
         </p:sp>
@@ -3210,17 +3220,18 @@
           <a:lstStyle/>
           <a:p>
             <a:pPr algn="ctr"/>
+            <a:endParaRPr/>
           </a:p>
         </p:txBody>
       </p:sp>
       <p:grpSp>
         <p:nvGrpSpPr>
-          <p:cNvPr name="Group 18" id="4"/>
+          <p:cNvPr id="4" name="Group 18"/>
           <p:cNvGrpSpPr/>
           <p:nvPr/>
         </p:nvGrpSpPr>
         <p:grpSpPr>
-          <a:xfrm rot="0">
+          <a:xfrm>
             <a:off x="-769371" y="0"/>
             <a:ext cx="3167383" cy="1619250"/>
             <a:chOff x="0" y="0"/>
@@ -3229,12 +3240,12 @@
         </p:grpSpPr>
         <p:sp>
           <p:nvSpPr>
-            <p:cNvPr name="Freeform 19" id="5"/>
+            <p:cNvPr id="27" name="Freeform 19"/>
             <p:cNvSpPr/>
             <p:nvPr/>
           </p:nvSpPr>
           <p:spPr>
-            <a:xfrm flipH="false" flipV="false" rot="0">
+            <a:xfrm>
               <a:off x="0" y="0"/>
               <a:ext cx="979343" cy="500666"/>
             </a:xfrm>
@@ -3243,9 +3254,9 @@
               <a:gdLst/>
               <a:ahLst/>
               <a:cxnLst/>
-              <a:rect r="r" b="b" t="t" l="l"/>
+              <a:rect l="l" t="t" r="r" b="b"/>
               <a:pathLst>
-                <a:path h="500666" w="979343">
+                <a:path w="979343" h="500666">
                   <a:moveTo>
                     <a:pt x="203200" y="0"/>
                   </a:moveTo>
@@ -3269,11 +3280,18 @@
               <a:srgbClr val="1B75BC"/>
             </a:solidFill>
           </p:spPr>
+          <p:txBody>
+            <a:bodyPr/>
+            <a:lstStyle/>
+            <a:p>
+              <a:endParaRPr lang="ja-JP" altLang="en-US"/>
+            </a:p>
+          </p:txBody>
         </p:sp>
         <p:sp>
           <p:nvSpPr>
-            <p:cNvPr name="TextBox 20" id="6"/>
-            <p:cNvSpPr txBox="true"/>
+            <p:cNvPr id="28" name="TextBox 20"/>
+            <p:cNvSpPr txBox="1"/>
             <p:nvPr/>
           </p:nvSpPr>
           <p:spPr>
@@ -3286,7 +3304,7 @@
             </a:prstGeom>
           </p:spPr>
           <p:txBody>
-            <a:bodyPr anchor="ctr" rtlCol="false" tIns="50800" lIns="50800" bIns="50800" rIns="50800"/>
+            <a:bodyPr lIns="50800" tIns="50800" rIns="50800" bIns="50800" rtlCol="0" anchor="ctr"/>
             <a:lstStyle/>
             <a:p>
               <a:pPr algn="ctr">
@@ -3294,6 +3312,7 @@
                   <a:spcPts val="3456"/>
                 </a:lnSpc>
               </a:pPr>
+              <a:endParaRPr/>
             </a:p>
           </p:txBody>
         </p:sp>
@@ -3322,7 +3341,7 @@
           <a:p>
             <a:pPr algn="l"/>
             <a:r>
-              <a:rPr sz="6000" b="1">
+              <a:rPr sz="6000" b="1" dirty="0">
                 <a:solidFill>
                   <a:srgbClr val="FFFFFF"/>
                 </a:solidFill>
@@ -3335,7 +3354,7 @@
       </p:sp>
       <p:sp>
         <p:nvSpPr>
-          <p:cNvPr id="4" name="TextBox 3"/>
+          <p:cNvPr id="29" name="TextBox 3"/>
           <p:cNvSpPr txBox="1"/>
           <p:nvPr/>
         </p:nvSpPr>
@@ -3403,107 +3422,14 @@
           </a:p>
         </p:txBody>
       </p:sp>
-      <p:grpSp>
-        <p:nvGrpSpPr>
-          <p:cNvPr name="Group 5" id="7"/>
-          <p:cNvGrpSpPr/>
-          <p:nvPr/>
-        </p:nvGrpSpPr>
-        <p:grpSpPr>
-          <a:xfrm rot="0">
-            <a:off x="2176210" y="2367783"/>
-            <a:ext cx="2567568" cy="2567568"/>
-            <a:chOff x="0" y="0"/>
-            <a:chExt cx="812800" cy="812800"/>
-          </a:xfrm>
-        </p:grpSpPr>
-        <p:sp>
-          <p:nvSpPr>
-            <p:cNvPr name="Freeform 6" id="8"/>
-            <p:cNvSpPr/>
-            <p:nvPr/>
-          </p:nvSpPr>
-          <p:spPr>
-            <a:xfrm flipH="false" flipV="false" rot="0">
-              <a:off x="0" y="0"/>
-              <a:ext cx="812800" cy="812800"/>
-            </a:xfrm>
-            <a:custGeom>
-              <a:avLst/>
-              <a:gdLst/>
-              <a:ahLst/>
-              <a:cxnLst/>
-              <a:rect r="r" b="b" t="t" l="l"/>
-              <a:pathLst>
-                <a:path h="812800" w="812800">
-                  <a:moveTo>
-                    <a:pt x="406400" y="0"/>
-                  </a:moveTo>
-                  <a:cubicBezTo>
-                    <a:pt x="181951" y="0"/>
-                    <a:pt x="0" y="181951"/>
-                    <a:pt x="0" y="406400"/>
-                  </a:cubicBezTo>
-                  <a:cubicBezTo>
-                    <a:pt x="0" y="630849"/>
-                    <a:pt x="181951" y="812800"/>
-                    <a:pt x="406400" y="812800"/>
-                  </a:cubicBezTo>
-                  <a:cubicBezTo>
-                    <a:pt x="630849" y="812800"/>
-                    <a:pt x="812800" y="630849"/>
-                    <a:pt x="812800" y="406400"/>
-                  </a:cubicBezTo>
-                  <a:cubicBezTo>
-                    <a:pt x="812800" y="181951"/>
-                    <a:pt x="630849" y="0"/>
-                    <a:pt x="406400" y="0"/>
-                  </a:cubicBezTo>
-                  <a:close/>
-                </a:path>
-              </a:pathLst>
-            </a:custGeom>
-            <a:solidFill>
-              <a:srgbClr val="00AEEF"/>
-            </a:solidFill>
-          </p:spPr>
-        </p:sp>
-        <p:sp>
-          <p:nvSpPr>
-            <p:cNvPr name="TextBox 7" id="9"/>
-            <p:cNvSpPr txBox="true"/>
-            <p:nvPr/>
-          </p:nvSpPr>
-          <p:spPr>
-            <a:xfrm>
-              <a:off x="76200" y="-209550"/>
-              <a:ext cx="660400" cy="946150"/>
-            </a:xfrm>
-            <a:prstGeom prst="rect">
-              <a:avLst/>
-            </a:prstGeom>
-          </p:spPr>
-          <p:txBody>
-            <a:bodyPr anchor="ctr" rtlCol="false" tIns="50800" lIns="50800" bIns="50800" rIns="50800"/>
-            <a:lstStyle/>
-            <a:p>
-              <a:pPr algn="ctr">
-                <a:lnSpc>
-                  <a:spcPts val="3456"/>
-                </a:lnSpc>
-              </a:pPr>
-            </a:p>
-          </p:txBody>
-        </p:sp>
-      </p:grpSp>
-      <p:sp>
-        <p:nvSpPr>
-          <p:cNvPr name="Freeform 21" id="10"/>
+      <p:sp>
+        <p:nvSpPr>
+          <p:cNvPr id="10" name="Freeform 21"/>
           <p:cNvSpPr/>
           <p:nvPr/>
         </p:nvSpPr>
         <p:spPr>
-          <a:xfrm flipH="false" flipV="false" rot="0">
+          <a:xfrm>
             <a:off x="2802769" y="2994342"/>
             <a:ext cx="1314450" cy="1314450"/>
           </a:xfrm>
@@ -3512,9 +3438,9 @@
             <a:gdLst/>
             <a:ahLst/>
             <a:cxnLst/>
-            <a:rect r="r" b="b" t="t" l="l"/>
+            <a:rect l="l" t="t" r="r" b="b"/>
             <a:pathLst>
-              <a:path h="1314450" w="1314450">
+              <a:path w="1314450" h="1314450">
                 <a:moveTo>
                   <a:pt x="0" y="0"/>
                 </a:moveTo>
@@ -3535,120 +3461,28 @@
             </a:pathLst>
           </a:custGeom>
           <a:blipFill>
-            <a:blip ns2:embed="rId6">
-              <a:extLst>
-                <a:ext uri="{96DAC541-7B7A-43D3-8B79-37D633B846F1}">
-                  <ns3:svgBlip ns2:embed="rId7"/>
-                </a:ext>
-              </a:extLst>
-            </a:blip>
+            <a:blip/>
             <a:stretch>
-              <a:fillRect l="0" t="0" r="0" b="0"/>
+              <a:fillRect/>
             </a:stretch>
           </a:blipFill>
         </p:spPr>
-      </p:sp>
-      <p:grpSp>
-        <p:nvGrpSpPr>
-          <p:cNvPr name="Group 8" id="11"/>
-          <p:cNvGrpSpPr/>
-          <p:nvPr/>
-        </p:nvGrpSpPr>
-        <p:grpSpPr>
-          <a:xfrm rot="0">
-            <a:off x="7862008" y="2367783"/>
-            <a:ext cx="2567568" cy="2567568"/>
-            <a:chOff x="0" y="0"/>
-            <a:chExt cx="812800" cy="812800"/>
-          </a:xfrm>
-        </p:grpSpPr>
-        <p:sp>
-          <p:nvSpPr>
-            <p:cNvPr name="Freeform 9" id="12"/>
-            <p:cNvSpPr/>
-            <p:nvPr/>
-          </p:nvSpPr>
-          <p:spPr>
-            <a:xfrm flipH="false" flipV="false" rot="0">
-              <a:off x="0" y="0"/>
-              <a:ext cx="812800" cy="812800"/>
-            </a:xfrm>
-            <a:custGeom>
-              <a:avLst/>
-              <a:gdLst/>
-              <a:ahLst/>
-              <a:cxnLst/>
-              <a:rect r="r" b="b" t="t" l="l"/>
-              <a:pathLst>
-                <a:path h="812800" w="812800">
-                  <a:moveTo>
-                    <a:pt x="406400" y="0"/>
-                  </a:moveTo>
-                  <a:cubicBezTo>
-                    <a:pt x="181951" y="0"/>
-                    <a:pt x="0" y="181951"/>
-                    <a:pt x="0" y="406400"/>
-                  </a:cubicBezTo>
-                  <a:cubicBezTo>
-                    <a:pt x="0" y="630849"/>
-                    <a:pt x="181951" y="812800"/>
-                    <a:pt x="406400" y="812800"/>
-                  </a:cubicBezTo>
-                  <a:cubicBezTo>
-                    <a:pt x="630849" y="812800"/>
-                    <a:pt x="812800" y="630849"/>
-                    <a:pt x="812800" y="406400"/>
-                  </a:cubicBezTo>
-                  <a:cubicBezTo>
-                    <a:pt x="812800" y="181951"/>
-                    <a:pt x="630849" y="0"/>
-                    <a:pt x="406400" y="0"/>
-                  </a:cubicBezTo>
-                  <a:close/>
-                </a:path>
-              </a:pathLst>
-            </a:custGeom>
-            <a:solidFill>
-              <a:srgbClr val="00AEEF"/>
-            </a:solidFill>
-          </p:spPr>
-        </p:sp>
-        <p:sp>
-          <p:nvSpPr>
-            <p:cNvPr name="TextBox 10" id="13"/>
-            <p:cNvSpPr txBox="true"/>
-            <p:nvPr/>
-          </p:nvSpPr>
-          <p:spPr>
-            <a:xfrm>
-              <a:off x="76200" y="-209550"/>
-              <a:ext cx="660400" cy="946150"/>
-            </a:xfrm>
-            <a:prstGeom prst="rect">
-              <a:avLst/>
-            </a:prstGeom>
-          </p:spPr>
-          <p:txBody>
-            <a:bodyPr anchor="ctr" rtlCol="false" tIns="50800" lIns="50800" bIns="50800" rIns="50800"/>
-            <a:lstStyle/>
-            <a:p>
-              <a:pPr algn="ctr">
-                <a:lnSpc>
-                  <a:spcPts val="3456"/>
-                </a:lnSpc>
-              </a:pPr>
-            </a:p>
-          </p:txBody>
-        </p:sp>
-      </p:grpSp>
-      <p:sp>
-        <p:nvSpPr>
-          <p:cNvPr name="Freeform 11" id="14"/>
+        <p:txBody>
+          <a:bodyPr/>
+          <a:lstStyle/>
+          <a:p>
+            <a:endParaRPr lang="ja-JP" altLang="en-US"/>
+          </a:p>
+        </p:txBody>
+      </p:sp>
+      <p:sp>
+        <p:nvSpPr>
+          <p:cNvPr id="14" name="Freeform 11"/>
           <p:cNvSpPr/>
           <p:nvPr/>
         </p:nvSpPr>
         <p:spPr>
-          <a:xfrm flipH="false" flipV="false" rot="0">
+          <a:xfrm>
             <a:off x="8502855" y="3049497"/>
             <a:ext cx="1285875" cy="1250806"/>
           </a:xfrm>
@@ -3657,9 +3491,9 @@
             <a:gdLst/>
             <a:ahLst/>
             <a:cxnLst/>
-            <a:rect r="r" b="b" t="t" l="l"/>
+            <a:rect l="l" t="t" r="r" b="b"/>
             <a:pathLst>
-              <a:path h="1250806" w="1285875">
+              <a:path w="1285875" h="1250806">
                 <a:moveTo>
                   <a:pt x="0" y="0"/>
                 </a:moveTo>
@@ -3680,120 +3514,28 @@
             </a:pathLst>
           </a:custGeom>
           <a:blipFill>
-            <a:blip ns2:embed="rId2">
-              <a:extLst>
-                <a:ext uri="{96DAC541-7B7A-43D3-8B79-37D633B846F1}">
-                  <ns3:svgBlip ns2:embed="rId3"/>
-                </a:ext>
-              </a:extLst>
-            </a:blip>
+            <a:blip/>
             <a:stretch>
-              <a:fillRect l="0" t="0" r="0" b="0"/>
+              <a:fillRect/>
             </a:stretch>
           </a:blipFill>
         </p:spPr>
-      </p:sp>
-      <p:grpSp>
-        <p:nvGrpSpPr>
-          <p:cNvPr name="Group 12" id="15"/>
-          <p:cNvGrpSpPr/>
-          <p:nvPr/>
-        </p:nvGrpSpPr>
-        <p:grpSpPr>
-          <a:xfrm rot="0">
-            <a:off x="13544222" y="2367783"/>
-            <a:ext cx="2567568" cy="2567568"/>
-            <a:chOff x="0" y="0"/>
-            <a:chExt cx="812800" cy="812800"/>
-          </a:xfrm>
-        </p:grpSpPr>
-        <p:sp>
-          <p:nvSpPr>
-            <p:cNvPr name="Freeform 13" id="16"/>
-            <p:cNvSpPr/>
-            <p:nvPr/>
-          </p:nvSpPr>
-          <p:spPr>
-            <a:xfrm flipH="false" flipV="false" rot="0">
-              <a:off x="0" y="0"/>
-              <a:ext cx="812800" cy="812800"/>
-            </a:xfrm>
-            <a:custGeom>
-              <a:avLst/>
-              <a:gdLst/>
-              <a:ahLst/>
-              <a:cxnLst/>
-              <a:rect r="r" b="b" t="t" l="l"/>
-              <a:pathLst>
-                <a:path h="812800" w="812800">
-                  <a:moveTo>
-                    <a:pt x="406400" y="0"/>
-                  </a:moveTo>
-                  <a:cubicBezTo>
-                    <a:pt x="181951" y="0"/>
-                    <a:pt x="0" y="181951"/>
-                    <a:pt x="0" y="406400"/>
-                  </a:cubicBezTo>
-                  <a:cubicBezTo>
-                    <a:pt x="0" y="630849"/>
-                    <a:pt x="181951" y="812800"/>
-                    <a:pt x="406400" y="812800"/>
-                  </a:cubicBezTo>
-                  <a:cubicBezTo>
-                    <a:pt x="630849" y="812800"/>
-                    <a:pt x="812800" y="630849"/>
-                    <a:pt x="812800" y="406400"/>
-                  </a:cubicBezTo>
-                  <a:cubicBezTo>
-                    <a:pt x="812800" y="181951"/>
-                    <a:pt x="630849" y="0"/>
-                    <a:pt x="406400" y="0"/>
-                  </a:cubicBezTo>
-                  <a:close/>
-                </a:path>
-              </a:pathLst>
-            </a:custGeom>
-            <a:solidFill>
-              <a:srgbClr val="00AEEF"/>
-            </a:solidFill>
-          </p:spPr>
-        </p:sp>
-        <p:sp>
-          <p:nvSpPr>
-            <p:cNvPr name="TextBox 14" id="17"/>
-            <p:cNvSpPr txBox="true"/>
-            <p:nvPr/>
-          </p:nvSpPr>
-          <p:spPr>
-            <a:xfrm>
-              <a:off x="76200" y="-209550"/>
-              <a:ext cx="660400" cy="946150"/>
-            </a:xfrm>
-            <a:prstGeom prst="rect">
-              <a:avLst/>
-            </a:prstGeom>
-          </p:spPr>
-          <p:txBody>
-            <a:bodyPr anchor="ctr" rtlCol="false" tIns="50800" lIns="50800" bIns="50800" rIns="50800"/>
-            <a:lstStyle/>
-            <a:p>
-              <a:pPr algn="ctr">
-                <a:lnSpc>
-                  <a:spcPts val="3456"/>
-                </a:lnSpc>
-              </a:pPr>
-            </a:p>
-          </p:txBody>
-        </p:sp>
-      </p:grpSp>
-      <p:sp>
-        <p:nvSpPr>
-          <p:cNvPr name="Freeform 15" id="18"/>
+        <p:txBody>
+          <a:bodyPr/>
+          <a:lstStyle/>
+          <a:p>
+            <a:endParaRPr lang="ja-JP" altLang="en-US"/>
+          </a:p>
+        </p:txBody>
+      </p:sp>
+      <p:sp>
+        <p:nvSpPr>
+          <p:cNvPr id="18" name="Freeform 15"/>
           <p:cNvSpPr/>
           <p:nvPr/>
         </p:nvSpPr>
         <p:spPr>
-          <a:xfrm flipH="false" flipV="false" rot="0">
+          <a:xfrm>
             <a:off x="14185068" y="3049497"/>
             <a:ext cx="1285875" cy="1288217"/>
           </a:xfrm>
@@ -3802,9 +3544,9 @@
             <a:gdLst/>
             <a:ahLst/>
             <a:cxnLst/>
-            <a:rect r="r" b="b" t="t" l="l"/>
+            <a:rect l="l" t="t" r="r" b="b"/>
             <a:pathLst>
-              <a:path h="1288217" w="1285875">
+              <a:path w="1285875" h="1288217">
                 <a:moveTo>
                   <a:pt x="0" y="0"/>
                 </a:moveTo>
@@ -3825,66 +3567,19 @@
             </a:pathLst>
           </a:custGeom>
           <a:blipFill>
-            <a:blip ns2:embed="rId4">
-              <a:extLst>
-                <a:ext uri="{96DAC541-7B7A-43D3-8B79-37D633B846F1}">
-                  <ns3:svgBlip ns2:embed="rId5"/>
-                </a:ext>
-              </a:extLst>
-            </a:blip>
+            <a:blip/>
             <a:stretch>
-              <a:fillRect l="0" t="0" r="0" b="0"/>
+              <a:fillRect/>
             </a:stretch>
           </a:blipFill>
         </p:spPr>
-      </p:sp>
-      <p:sp>
-        <p:nvSpPr>
-          <p:cNvPr name="AutoShape 16" id="19"/>
-          <p:cNvSpPr/>
-          <p:nvPr/>
-        </p:nvSpPr>
-        <p:spPr>
-          <a:xfrm>
-            <a:off x="6302231" y="2233969"/>
-            <a:ext cx="0" cy="7438313"/>
-          </a:xfrm>
-          <a:prstGeom prst="line">
-            <a:avLst/>
-          </a:prstGeom>
-          <a:ln cap="flat" w="19050">
-            <a:solidFill>
-              <a:srgbClr val="D9D9D9"/>
-            </a:solidFill>
-            <a:prstDash val="sysDash"/>
-            <a:headEnd type="none" len="sm" w="sm"/>
-            <a:tailEnd type="none" len="sm" w="sm"/>
-          </a:ln>
-        </p:spPr>
-      </p:sp>
-      <p:sp>
-        <p:nvSpPr>
-          <p:cNvPr name="AutoShape 17" id="20"/>
-          <p:cNvSpPr/>
-          <p:nvPr/>
-        </p:nvSpPr>
-        <p:spPr>
-          <a:xfrm>
-            <a:off x="11989353" y="2233969"/>
-            <a:ext cx="0" cy="7438313"/>
-          </a:xfrm>
-          <a:prstGeom prst="line">
-            <a:avLst/>
-          </a:prstGeom>
-          <a:ln cap="flat" w="19050">
-            <a:solidFill>
-              <a:srgbClr val="D9D9D9"/>
-            </a:solidFill>
-            <a:prstDash val="sysDash"/>
-            <a:headEnd type="none" len="sm" w="sm"/>
-            <a:tailEnd type="none" len="sm" w="sm"/>
-          </a:ln>
-        </p:spPr>
+        <p:txBody>
+          <a:bodyPr/>
+          <a:lstStyle/>
+          <a:p>
+            <a:endParaRPr lang="ja-JP" altLang="en-US"/>
+          </a:p>
+        </p:txBody>
       </p:sp>
       <p:sp>
         <p:nvSpPr>
@@ -3928,12 +3623,13 @@
           <a:lstStyle/>
           <a:p>
             <a:pPr algn="ctr"/>
-          </a:p>
-        </p:txBody>
-      </p:sp>
-      <p:sp>
-        <p:nvSpPr>
-          <p:cNvPr id="7" name="TextBox 6"/>
+            <a:endParaRPr/>
+          </a:p>
+        </p:txBody>
+      </p:sp>
+      <p:sp>
+        <p:nvSpPr>
+          <p:cNvPr id="36" name="TextBox 6"/>
           <p:cNvSpPr txBox="1"/>
           <p:nvPr/>
         </p:nvSpPr>
@@ -3959,14 +3655,29 @@
               </a:spcAft>
             </a:pPr>
             <a:r>
-              <a:rPr sz="1600" b="1">
+              <a:rPr sz="1600" b="1" dirty="0">
                 <a:solidFill>
                   <a:srgbClr val="FFFFFF"/>
                 </a:solidFill>
                 <a:latin typeface="BIZ UDPGothic"/>
               </a:rPr>
-              <a:t>GitHub API / Octokit</a:t>
-            </a:r>
+              <a:t>GitHub API / </a:t>
+            </a:r>
+            <a:r>
+              <a:rPr sz="1600" b="1" dirty="0" err="1">
+                <a:solidFill>
+                  <a:srgbClr val="FFFFFF"/>
+                </a:solidFill>
+                <a:latin typeface="BIZ UDPGothic"/>
+              </a:rPr>
+              <a:t>Octokit</a:t>
+            </a:r>
+            <a:endParaRPr sz="1600" b="1" dirty="0">
+              <a:solidFill>
+                <a:srgbClr val="FFFFFF"/>
+              </a:solidFill>
+              <a:latin typeface="BIZ UDPGothic"/>
+            </a:endParaRPr>
           </a:p>
           <a:p>
             <a:pPr>
@@ -3974,15 +3685,12 @@
                 <a:spcPts val="400"/>
               </a:spcAft>
             </a:pPr>
-            <a:r>
-              <a:rPr sz="1600" b="0">
-                <a:solidFill>
-                  <a:srgbClr val="FFFFFF"/>
-                </a:solidFill>
-                <a:latin typeface="BIZ UDPGothic"/>
-              </a:rPr>
-              <a:t/>
-            </a:r>
+            <a:endParaRPr sz="1600" b="1" dirty="0">
+              <a:solidFill>
+                <a:srgbClr val="FFFFFF"/>
+              </a:solidFill>
+              <a:latin typeface="BIZ UDPGothic"/>
+            </a:endParaRPr>
           </a:p>
           <a:p>
             <a:pPr>
@@ -3991,7 +3699,7 @@
               </a:spcAft>
             </a:pPr>
             <a:r>
-              <a:rPr sz="1600" b="0">
+              <a:rPr sz="1600" b="0" dirty="0" err="1">
                 <a:solidFill>
                   <a:srgbClr val="FFFFFF"/>
                 </a:solidFill>
@@ -3999,6 +3707,12 @@
               </a:rPr>
               <a:t>リポジトリ情報を取得</a:t>
             </a:r>
+            <a:endParaRPr sz="1600" b="0" dirty="0">
+              <a:solidFill>
+                <a:srgbClr val="FFFFFF"/>
+              </a:solidFill>
+              <a:latin typeface="BIZ UDPGothic"/>
+            </a:endParaRPr>
           </a:p>
           <a:p>
             <a:pPr>
@@ -4007,13 +3721,31 @@
               </a:spcAft>
             </a:pPr>
             <a:r>
-              <a:rPr sz="1600" b="0">
+              <a:rPr sz="1600" b="0" dirty="0">
                 <a:solidFill>
                   <a:srgbClr val="FFFFFF"/>
                 </a:solidFill>
                 <a:latin typeface="BIZ UDPGothic"/>
               </a:rPr>
-              <a:t>・ファイル構造 / README</a:t>
+              <a:t>・</a:t>
+            </a:r>
+            <a:r>
+              <a:rPr sz="1600" b="0" dirty="0" err="1">
+                <a:solidFill>
+                  <a:srgbClr val="FFFFFF"/>
+                </a:solidFill>
+                <a:latin typeface="BIZ UDPGothic"/>
+              </a:rPr>
+              <a:t>ファイル構造</a:t>
+            </a:r>
+            <a:r>
+              <a:rPr sz="1600" b="0" dirty="0">
+                <a:solidFill>
+                  <a:srgbClr val="FFFFFF"/>
+                </a:solidFill>
+                <a:latin typeface="BIZ UDPGothic"/>
+              </a:rPr>
+              <a:t> / README</a:t>
             </a:r>
           </a:p>
           <a:p>
@@ -4023,7 +3755,7 @@
               </a:spcAft>
             </a:pPr>
             <a:r>
-              <a:rPr sz="1600" b="0">
+              <a:rPr sz="1600" b="0" dirty="0">
                 <a:solidFill>
                   <a:srgbClr val="FFFFFF"/>
                 </a:solidFill>
@@ -4039,7 +3771,7 @@
               </a:spcAft>
             </a:pPr>
             <a:r>
-              <a:rPr sz="1600" b="0">
+              <a:rPr sz="1600" b="0" dirty="0">
                 <a:solidFill>
                   <a:srgbClr val="FFFFFF"/>
                 </a:solidFill>
@@ -4127,12 +3859,13 @@
           <a:lstStyle/>
           <a:p>
             <a:pPr algn="ctr"/>
-          </a:p>
-        </p:txBody>
-      </p:sp>
-      <p:sp>
-        <p:nvSpPr>
-          <p:cNvPr id="10" name="TextBox 9"/>
+            <a:endParaRPr/>
+          </a:p>
+        </p:txBody>
+      </p:sp>
+      <p:sp>
+        <p:nvSpPr>
+          <p:cNvPr id="37" name="TextBox 9"/>
           <p:cNvSpPr txBox="1"/>
           <p:nvPr/>
         </p:nvSpPr>
@@ -4173,15 +3906,12 @@
                 <a:spcPts val="400"/>
               </a:spcAft>
             </a:pPr>
-            <a:r>
-              <a:rPr sz="1600" b="0">
-                <a:solidFill>
-                  <a:srgbClr val="FFFFFF"/>
-                </a:solidFill>
-                <a:latin typeface="BIZ UDPGothic"/>
-              </a:rPr>
-              <a:t/>
-            </a:r>
+            <a:endParaRPr sz="1600" b="1">
+              <a:solidFill>
+                <a:srgbClr val="FFFFFF"/>
+              </a:solidFill>
+              <a:latin typeface="BIZ UDPGothic"/>
+            </a:endParaRPr>
           </a:p>
           <a:p>
             <a:pPr>
@@ -4219,7 +3949,7 @@
       </p:sp>
       <p:sp>
         <p:nvSpPr>
-          <p:cNvPr id="11" name="TextBox 10"/>
+          <p:cNvPr id="38" name="TextBox 10"/>
           <p:cNvSpPr txBox="1"/>
           <p:nvPr/>
         </p:nvSpPr>
@@ -4294,6 +4024,7 @@
           <a:lstStyle/>
           <a:p>
             <a:pPr algn="ctr"/>
+            <a:endParaRPr/>
           </a:p>
         </p:txBody>
       </p:sp>
@@ -4340,15 +4071,12 @@
                 <a:spcPts val="400"/>
               </a:spcAft>
             </a:pPr>
-            <a:r>
-              <a:rPr sz="1600" b="0">
-                <a:solidFill>
-                  <a:srgbClr val="FFFFFF"/>
-                </a:solidFill>
-                <a:latin typeface="BIZ UDPGothic"/>
-              </a:rPr>
-              <a:t/>
-            </a:r>
+            <a:endParaRPr sz="1600" b="1">
+              <a:solidFill>
+                <a:srgbClr val="FFFFFF"/>
+              </a:solidFill>
+              <a:latin typeface="BIZ UDPGothic"/>
+            </a:endParaRPr>
           </a:p>
           <a:p>
             <a:pPr>
@@ -4418,7 +4146,7 @@
       </p:sp>
       <p:sp>
         <p:nvSpPr>
-          <p:cNvPr id="14" name="Oval 13"/>
+          <p:cNvPr id="39" name="Oval 13"/>
           <p:cNvSpPr/>
           <p:nvPr/>
         </p:nvSpPr>
@@ -4452,7 +4180,7 @@
           </a:fontRef>
         </p:style>
         <p:txBody>
-          <a:bodyPr rtlCol="0" anchor="ctr" wrap="none"/>
+          <a:bodyPr wrap="none" rtlCol="0" anchor="ctr"/>
           <a:lstStyle/>
           <a:p>
             <a:pPr algn="ctr"/>
@@ -4470,7 +4198,7 @@
       </p:sp>
       <p:sp>
         <p:nvSpPr>
-          <p:cNvPr id="15" name="TextBox 14"/>
+          <p:cNvPr id="40" name="TextBox 14"/>
           <p:cNvSpPr txBox="1"/>
           <p:nvPr/>
         </p:nvSpPr>
@@ -4539,7 +4267,7 @@
           </a:fontRef>
         </p:style>
         <p:txBody>
-          <a:bodyPr rtlCol="0" anchor="ctr" wrap="none"/>
+          <a:bodyPr wrap="none" rtlCol="0" anchor="ctr"/>
           <a:lstStyle/>
           <a:p>
             <a:pPr algn="ctr"/>
@@ -4592,7 +4320,7 @@
       </p:sp>
       <p:sp>
         <p:nvSpPr>
-          <p:cNvPr id="18" name="Oval 17"/>
+          <p:cNvPr id="41" name="Oval 17"/>
           <p:cNvSpPr/>
           <p:nvPr/>
         </p:nvSpPr>
@@ -4626,7 +4354,7 @@
           </a:fontRef>
         </p:style>
         <p:txBody>
-          <a:bodyPr rtlCol="0" anchor="ctr" wrap="none"/>
+          <a:bodyPr wrap="none" rtlCol="0" anchor="ctr"/>
           <a:lstStyle/>
           <a:p>
             <a:pPr algn="ctr"/>
@@ -4644,7 +4372,7 @@
       </p:sp>
       <p:sp>
         <p:nvSpPr>
-          <p:cNvPr id="19" name="TextBox 18"/>
+          <p:cNvPr id="42" name="TextBox 18"/>
           <p:cNvSpPr txBox="1"/>
           <p:nvPr/>
         </p:nvSpPr>
@@ -4679,7 +4407,7 @@
       </p:sp>
       <p:sp>
         <p:nvSpPr>
-          <p:cNvPr id="20" name="Oval 19"/>
+          <p:cNvPr id="43" name="Oval 19"/>
           <p:cNvSpPr/>
           <p:nvPr/>
         </p:nvSpPr>
@@ -4713,7 +4441,7 @@
           </a:fontRef>
         </p:style>
         <p:txBody>
-          <a:bodyPr rtlCol="0" anchor="ctr" wrap="none"/>
+          <a:bodyPr wrap="none" rtlCol="0" anchor="ctr"/>
           <a:lstStyle/>
           <a:p>
             <a:pPr algn="ctr"/>
@@ -4806,6 +4534,7 @@
           <a:lstStyle/>
           <a:p>
             <a:pPr algn="ctr"/>
+            <a:endParaRPr/>
           </a:p>
         </p:txBody>
       </p:sp>

--- a/outputs/StepByハッカソン/ロジック_スライド_完成.pptx
+++ b/outputs/StepByハッカソン/ロジック_スライド_完成.pptx
@@ -5,9 +5,9 @@
     <p:sldMasterId id="2147483648" r:id="rId1"/>
   </p:sldMasterIdLst>
   <p:sldIdLst>
-    <p:sldId id="256" r:id="rId2"/>
+    <p:sldId id="256" r:id="rId7"/>
   </p:sldIdLst>
-  <p:sldSz cx="18288000" cy="10287000"/>
+  <p:sldSz cx="18288000" cy="10287000" type="screen4x3"/>
   <p:notesSz cx="6858000" cy="9144000"/>
   <p:defaultTextStyle>
     <a:defPPr>
@@ -104,22 +104,6 @@
       </a:defRPr>
     </a:lvl9pPr>
   </p:defaultTextStyle>
-  <p:extLst>
-    <p:ext uri="{EFAFB233-063F-42B5-8137-9DF3F51BA10A}">
-      <p15:sldGuideLst xmlns:p15="http://schemas.microsoft.com/office/powerpoint/2012/main">
-        <p15:guide id="1" orient="horz" pos="2160">
-          <p15:clr>
-            <a:srgbClr val="A4A3A4"/>
-          </p15:clr>
-        </p15:guide>
-        <p15:guide id="2" pos="2880">
-          <p15:clr>
-            <a:srgbClr val="A4A3A4"/>
-          </p15:clr>
-        </p15:guide>
-      </p15:sldGuideLst>
-    </p:ext>
-  </p:extLst>
 </p:presentation>
 </file>
 
@@ -161,9 +145,10 @@
           <a:lstStyle/>
           <a:p>
             <a:r>
-              <a:rPr lang="en-US"/>
+              <a:rPr lang="en-US" smtClean="0"/>
               <a:t>Click to edit Master title style</a:t>
             </a:r>
+            <a:endParaRPr lang="en-US"/>
           </a:p>
         </p:txBody>
       </p:sp>
@@ -279,9 +264,10 @@
           </a:lstStyle>
           <a:p>
             <a:r>
-              <a:rPr lang="en-US"/>
+              <a:rPr lang="en-US" smtClean="0"/>
               <a:t>Click to edit Master subtitle style</a:t>
             </a:r>
+            <a:endParaRPr lang="en-US"/>
           </a:p>
         </p:txBody>
       </p:sp>
@@ -302,7 +288,7 @@
           <a:p>
             <a:fld id="{5BCAD085-E8A6-8845-BD4E-CB4CCA059FC4}" type="datetimeFigureOut">
               <a:rPr lang="en-US" smtClean="0"/>
-              <a:t>3/20/2026</a:t>
+              <a:t>1/27/13</a:t>
             </a:fld>
             <a:endParaRPr lang="en-US"/>
           </a:p>
@@ -396,9 +382,10 @@
           <a:lstStyle/>
           <a:p>
             <a:r>
-              <a:rPr lang="en-US"/>
+              <a:rPr lang="en-US" smtClean="0"/>
               <a:t>Click to edit Master title style</a:t>
             </a:r>
+            <a:endParaRPr lang="en-US"/>
           </a:p>
         </p:txBody>
       </p:sp>
@@ -419,37 +406,38 @@
           <a:p>
             <a:pPr lvl="0"/>
             <a:r>
-              <a:rPr lang="en-US"/>
+              <a:rPr lang="en-US" smtClean="0"/>
               <a:t>Click to edit Master text styles</a:t>
             </a:r>
           </a:p>
           <a:p>
             <a:pPr lvl="1"/>
             <a:r>
-              <a:rPr lang="en-US"/>
+              <a:rPr lang="en-US" smtClean="0"/>
               <a:t>Second level</a:t>
             </a:r>
           </a:p>
           <a:p>
             <a:pPr lvl="2"/>
             <a:r>
-              <a:rPr lang="en-US"/>
+              <a:rPr lang="en-US" smtClean="0"/>
               <a:t>Third level</a:t>
             </a:r>
           </a:p>
           <a:p>
             <a:pPr lvl="3"/>
             <a:r>
-              <a:rPr lang="en-US"/>
+              <a:rPr lang="en-US" smtClean="0"/>
               <a:t>Fourth level</a:t>
             </a:r>
           </a:p>
           <a:p>
             <a:pPr lvl="4"/>
             <a:r>
-              <a:rPr lang="en-US"/>
+              <a:rPr lang="en-US" smtClean="0"/>
               <a:t>Fifth level</a:t>
             </a:r>
+            <a:endParaRPr lang="en-US"/>
           </a:p>
         </p:txBody>
       </p:sp>
@@ -470,7 +458,7 @@
           <a:p>
             <a:fld id="{5BCAD085-E8A6-8845-BD4E-CB4CCA059FC4}" type="datetimeFigureOut">
               <a:rPr lang="en-US" smtClean="0"/>
-              <a:t>3/20/2026</a:t>
+              <a:t>1/27/13</a:t>
             </a:fld>
             <a:endParaRPr lang="en-US"/>
           </a:p>
@@ -569,9 +557,10 @@
           <a:lstStyle/>
           <a:p>
             <a:r>
-              <a:rPr lang="en-US"/>
+              <a:rPr lang="en-US" smtClean="0"/>
               <a:t>Click to edit Master title style</a:t>
             </a:r>
+            <a:endParaRPr lang="en-US"/>
           </a:p>
         </p:txBody>
       </p:sp>
@@ -597,37 +586,38 @@
           <a:p>
             <a:pPr lvl="0"/>
             <a:r>
-              <a:rPr lang="en-US"/>
+              <a:rPr lang="en-US" smtClean="0"/>
               <a:t>Click to edit Master text styles</a:t>
             </a:r>
           </a:p>
           <a:p>
             <a:pPr lvl="1"/>
             <a:r>
-              <a:rPr lang="en-US"/>
+              <a:rPr lang="en-US" smtClean="0"/>
               <a:t>Second level</a:t>
             </a:r>
           </a:p>
           <a:p>
             <a:pPr lvl="2"/>
             <a:r>
-              <a:rPr lang="en-US"/>
+              <a:rPr lang="en-US" smtClean="0"/>
               <a:t>Third level</a:t>
             </a:r>
           </a:p>
           <a:p>
             <a:pPr lvl="3"/>
             <a:r>
-              <a:rPr lang="en-US"/>
+              <a:rPr lang="en-US" smtClean="0"/>
               <a:t>Fourth level</a:t>
             </a:r>
           </a:p>
           <a:p>
             <a:pPr lvl="4"/>
             <a:r>
-              <a:rPr lang="en-US"/>
+              <a:rPr lang="en-US" smtClean="0"/>
               <a:t>Fifth level</a:t>
             </a:r>
+            <a:endParaRPr lang="en-US"/>
           </a:p>
         </p:txBody>
       </p:sp>
@@ -648,7 +638,7 @@
           <a:p>
             <a:fld id="{5BCAD085-E8A6-8845-BD4E-CB4CCA059FC4}" type="datetimeFigureOut">
               <a:rPr lang="en-US" smtClean="0"/>
-              <a:t>3/20/2026</a:t>
+              <a:t>1/27/13</a:t>
             </a:fld>
             <a:endParaRPr lang="en-US"/>
           </a:p>
@@ -742,9 +732,10 @@
           <a:lstStyle/>
           <a:p>
             <a:r>
-              <a:rPr lang="en-US"/>
+              <a:rPr lang="en-US" smtClean="0"/>
               <a:t>Click to edit Master title style</a:t>
             </a:r>
+            <a:endParaRPr lang="en-US"/>
           </a:p>
         </p:txBody>
       </p:sp>
@@ -765,37 +756,38 @@
           <a:p>
             <a:pPr lvl="0"/>
             <a:r>
-              <a:rPr lang="en-US"/>
+              <a:rPr lang="en-US" smtClean="0"/>
               <a:t>Click to edit Master text styles</a:t>
             </a:r>
           </a:p>
           <a:p>
             <a:pPr lvl="1"/>
             <a:r>
-              <a:rPr lang="en-US"/>
+              <a:rPr lang="en-US" smtClean="0"/>
               <a:t>Second level</a:t>
             </a:r>
           </a:p>
           <a:p>
             <a:pPr lvl="2"/>
             <a:r>
-              <a:rPr lang="en-US"/>
+              <a:rPr lang="en-US" smtClean="0"/>
               <a:t>Third level</a:t>
             </a:r>
           </a:p>
           <a:p>
             <a:pPr lvl="3"/>
             <a:r>
-              <a:rPr lang="en-US"/>
+              <a:rPr lang="en-US" smtClean="0"/>
               <a:t>Fourth level</a:t>
             </a:r>
           </a:p>
           <a:p>
             <a:pPr lvl="4"/>
             <a:r>
-              <a:rPr lang="en-US"/>
+              <a:rPr lang="en-US" smtClean="0"/>
               <a:t>Fifth level</a:t>
             </a:r>
+            <a:endParaRPr lang="en-US"/>
           </a:p>
         </p:txBody>
       </p:sp>
@@ -816,7 +808,7 @@
           <a:p>
             <a:fld id="{5BCAD085-E8A6-8845-BD4E-CB4CCA059FC4}" type="datetimeFigureOut">
               <a:rPr lang="en-US" smtClean="0"/>
-              <a:t>3/20/2026</a:t>
+              <a:t>1/27/13</a:t>
             </a:fld>
             <a:endParaRPr lang="en-US"/>
           </a:p>
@@ -919,9 +911,10 @@
           </a:lstStyle>
           <a:p>
             <a:r>
-              <a:rPr lang="en-US"/>
+              <a:rPr lang="en-US" smtClean="0"/>
               <a:t>Click to edit Master title style</a:t>
             </a:r>
+            <a:endParaRPr lang="en-US"/>
           </a:p>
         </p:txBody>
       </p:sp>
@@ -1038,7 +1031,7 @@
           <a:p>
             <a:pPr lvl="0"/>
             <a:r>
-              <a:rPr lang="en-US"/>
+              <a:rPr lang="en-US" smtClean="0"/>
               <a:t>Click to edit Master text styles</a:t>
             </a:r>
           </a:p>
@@ -1061,7 +1054,7 @@
           <a:p>
             <a:fld id="{5BCAD085-E8A6-8845-BD4E-CB4CCA059FC4}" type="datetimeFigureOut">
               <a:rPr lang="en-US" smtClean="0"/>
-              <a:t>3/20/2026</a:t>
+              <a:t>1/27/13</a:t>
             </a:fld>
             <a:endParaRPr lang="en-US"/>
           </a:p>
@@ -1155,9 +1148,10 @@
           <a:lstStyle/>
           <a:p>
             <a:r>
-              <a:rPr lang="en-US"/>
+              <a:rPr lang="en-US" smtClean="0"/>
               <a:t>Click to edit Master title style</a:t>
             </a:r>
+            <a:endParaRPr lang="en-US"/>
           </a:p>
         </p:txBody>
       </p:sp>
@@ -1211,37 +1205,38 @@
           <a:p>
             <a:pPr lvl="0"/>
             <a:r>
-              <a:rPr lang="en-US"/>
+              <a:rPr lang="en-US" smtClean="0"/>
               <a:t>Click to edit Master text styles</a:t>
             </a:r>
           </a:p>
           <a:p>
             <a:pPr lvl="1"/>
             <a:r>
-              <a:rPr lang="en-US"/>
+              <a:rPr lang="en-US" smtClean="0"/>
               <a:t>Second level</a:t>
             </a:r>
           </a:p>
           <a:p>
             <a:pPr lvl="2"/>
             <a:r>
-              <a:rPr lang="en-US"/>
+              <a:rPr lang="en-US" smtClean="0"/>
               <a:t>Third level</a:t>
             </a:r>
           </a:p>
           <a:p>
             <a:pPr lvl="3"/>
             <a:r>
-              <a:rPr lang="en-US"/>
+              <a:rPr lang="en-US" smtClean="0"/>
               <a:t>Fourth level</a:t>
             </a:r>
           </a:p>
           <a:p>
             <a:pPr lvl="4"/>
             <a:r>
-              <a:rPr lang="en-US"/>
+              <a:rPr lang="en-US" smtClean="0"/>
               <a:t>Fifth level</a:t>
             </a:r>
+            <a:endParaRPr lang="en-US"/>
           </a:p>
         </p:txBody>
       </p:sp>
@@ -1295,37 +1290,38 @@
           <a:p>
             <a:pPr lvl="0"/>
             <a:r>
-              <a:rPr lang="en-US"/>
+              <a:rPr lang="en-US" smtClean="0"/>
               <a:t>Click to edit Master text styles</a:t>
             </a:r>
           </a:p>
           <a:p>
             <a:pPr lvl="1"/>
             <a:r>
-              <a:rPr lang="en-US"/>
+              <a:rPr lang="en-US" smtClean="0"/>
               <a:t>Second level</a:t>
             </a:r>
           </a:p>
           <a:p>
             <a:pPr lvl="2"/>
             <a:r>
-              <a:rPr lang="en-US"/>
+              <a:rPr lang="en-US" smtClean="0"/>
               <a:t>Third level</a:t>
             </a:r>
           </a:p>
           <a:p>
             <a:pPr lvl="3"/>
             <a:r>
-              <a:rPr lang="en-US"/>
+              <a:rPr lang="en-US" smtClean="0"/>
               <a:t>Fourth level</a:t>
             </a:r>
           </a:p>
           <a:p>
             <a:pPr lvl="4"/>
             <a:r>
-              <a:rPr lang="en-US"/>
+              <a:rPr lang="en-US" smtClean="0"/>
               <a:t>Fifth level</a:t>
             </a:r>
+            <a:endParaRPr lang="en-US"/>
           </a:p>
         </p:txBody>
       </p:sp>
@@ -1346,7 +1342,7 @@
           <a:p>
             <a:fld id="{5BCAD085-E8A6-8845-BD4E-CB4CCA059FC4}" type="datetimeFigureOut">
               <a:rPr lang="en-US" smtClean="0"/>
-              <a:t>3/20/2026</a:t>
+              <a:t>1/27/13</a:t>
             </a:fld>
             <a:endParaRPr lang="en-US"/>
           </a:p>
@@ -1444,9 +1440,10 @@
           </a:lstStyle>
           <a:p>
             <a:r>
-              <a:rPr lang="en-US"/>
+              <a:rPr lang="en-US" smtClean="0"/>
               <a:t>Click to edit Master title style</a:t>
             </a:r>
+            <a:endParaRPr lang="en-US"/>
           </a:p>
         </p:txBody>
       </p:sp>
@@ -1509,7 +1506,7 @@
           <a:p>
             <a:pPr lvl="0"/>
             <a:r>
-              <a:rPr lang="en-US"/>
+              <a:rPr lang="en-US" smtClean="0"/>
               <a:t>Click to edit Master text styles</a:t>
             </a:r>
           </a:p>
@@ -1565,37 +1562,38 @@
           <a:p>
             <a:pPr lvl="0"/>
             <a:r>
-              <a:rPr lang="en-US"/>
+              <a:rPr lang="en-US" smtClean="0"/>
               <a:t>Click to edit Master text styles</a:t>
             </a:r>
           </a:p>
           <a:p>
             <a:pPr lvl="1"/>
             <a:r>
-              <a:rPr lang="en-US"/>
+              <a:rPr lang="en-US" smtClean="0"/>
               <a:t>Second level</a:t>
             </a:r>
           </a:p>
           <a:p>
             <a:pPr lvl="2"/>
             <a:r>
-              <a:rPr lang="en-US"/>
+              <a:rPr lang="en-US" smtClean="0"/>
               <a:t>Third level</a:t>
             </a:r>
           </a:p>
           <a:p>
             <a:pPr lvl="3"/>
             <a:r>
-              <a:rPr lang="en-US"/>
+              <a:rPr lang="en-US" smtClean="0"/>
               <a:t>Fourth level</a:t>
             </a:r>
           </a:p>
           <a:p>
             <a:pPr lvl="4"/>
             <a:r>
-              <a:rPr lang="en-US"/>
+              <a:rPr lang="en-US" smtClean="0"/>
               <a:t>Fifth level</a:t>
             </a:r>
+            <a:endParaRPr lang="en-US"/>
           </a:p>
         </p:txBody>
       </p:sp>
@@ -1658,7 +1656,7 @@
           <a:p>
             <a:pPr lvl="0"/>
             <a:r>
-              <a:rPr lang="en-US"/>
+              <a:rPr lang="en-US" smtClean="0"/>
               <a:t>Click to edit Master text styles</a:t>
             </a:r>
           </a:p>
@@ -1714,37 +1712,38 @@
           <a:p>
             <a:pPr lvl="0"/>
             <a:r>
-              <a:rPr lang="en-US"/>
+              <a:rPr lang="en-US" smtClean="0"/>
               <a:t>Click to edit Master text styles</a:t>
             </a:r>
           </a:p>
           <a:p>
             <a:pPr lvl="1"/>
             <a:r>
-              <a:rPr lang="en-US"/>
+              <a:rPr lang="en-US" smtClean="0"/>
               <a:t>Second level</a:t>
             </a:r>
           </a:p>
           <a:p>
             <a:pPr lvl="2"/>
             <a:r>
-              <a:rPr lang="en-US"/>
+              <a:rPr lang="en-US" smtClean="0"/>
               <a:t>Third level</a:t>
             </a:r>
           </a:p>
           <a:p>
             <a:pPr lvl="3"/>
             <a:r>
-              <a:rPr lang="en-US"/>
+              <a:rPr lang="en-US" smtClean="0"/>
               <a:t>Fourth level</a:t>
             </a:r>
           </a:p>
           <a:p>
             <a:pPr lvl="4"/>
             <a:r>
-              <a:rPr lang="en-US"/>
+              <a:rPr lang="en-US" smtClean="0"/>
               <a:t>Fifth level</a:t>
             </a:r>
+            <a:endParaRPr lang="en-US"/>
           </a:p>
         </p:txBody>
       </p:sp>
@@ -1765,7 +1764,7 @@
           <a:p>
             <a:fld id="{5BCAD085-E8A6-8845-BD4E-CB4CCA059FC4}" type="datetimeFigureOut">
               <a:rPr lang="en-US" smtClean="0"/>
-              <a:t>3/20/2026</a:t>
+              <a:t>1/27/13</a:t>
             </a:fld>
             <a:endParaRPr lang="en-US"/>
           </a:p>
@@ -1859,9 +1858,10 @@
           <a:lstStyle/>
           <a:p>
             <a:r>
-              <a:rPr lang="en-US"/>
+              <a:rPr lang="en-US" smtClean="0"/>
               <a:t>Click to edit Master title style</a:t>
             </a:r>
+            <a:endParaRPr lang="en-US"/>
           </a:p>
         </p:txBody>
       </p:sp>
@@ -1882,7 +1882,7 @@
           <a:p>
             <a:fld id="{5BCAD085-E8A6-8845-BD4E-CB4CCA059FC4}" type="datetimeFigureOut">
               <a:rPr lang="en-US" smtClean="0"/>
-              <a:t>3/20/2026</a:t>
+              <a:t>1/27/13</a:t>
             </a:fld>
             <a:endParaRPr lang="en-US"/>
           </a:p>
@@ -1977,7 +1977,7 @@
           <a:p>
             <a:fld id="{5BCAD085-E8A6-8845-BD4E-CB4CCA059FC4}" type="datetimeFigureOut">
               <a:rPr lang="en-US" smtClean="0"/>
-              <a:t>3/20/2026</a:t>
+              <a:t>1/27/13</a:t>
             </a:fld>
             <a:endParaRPr lang="en-US"/>
           </a:p>
@@ -2080,9 +2080,10 @@
           </a:lstStyle>
           <a:p>
             <a:r>
-              <a:rPr lang="en-US"/>
+              <a:rPr lang="en-US" smtClean="0"/>
               <a:t>Click to edit Master title style</a:t>
             </a:r>
+            <a:endParaRPr lang="en-US"/>
           </a:p>
         </p:txBody>
       </p:sp>
@@ -2136,37 +2137,38 @@
           <a:p>
             <a:pPr lvl="0"/>
             <a:r>
-              <a:rPr lang="en-US"/>
+              <a:rPr lang="en-US" smtClean="0"/>
               <a:t>Click to edit Master text styles</a:t>
             </a:r>
           </a:p>
           <a:p>
             <a:pPr lvl="1"/>
             <a:r>
-              <a:rPr lang="en-US"/>
+              <a:rPr lang="en-US" smtClean="0"/>
               <a:t>Second level</a:t>
             </a:r>
           </a:p>
           <a:p>
             <a:pPr lvl="2"/>
             <a:r>
-              <a:rPr lang="en-US"/>
+              <a:rPr lang="en-US" smtClean="0"/>
               <a:t>Third level</a:t>
             </a:r>
           </a:p>
           <a:p>
             <a:pPr lvl="3"/>
             <a:r>
-              <a:rPr lang="en-US"/>
+              <a:rPr lang="en-US" smtClean="0"/>
               <a:t>Fourth level</a:t>
             </a:r>
           </a:p>
           <a:p>
             <a:pPr lvl="4"/>
             <a:r>
-              <a:rPr lang="en-US"/>
+              <a:rPr lang="en-US" smtClean="0"/>
               <a:t>Fifth level</a:t>
             </a:r>
+            <a:endParaRPr lang="en-US"/>
           </a:p>
         </p:txBody>
       </p:sp>
@@ -2229,7 +2231,7 @@
           <a:p>
             <a:pPr lvl="0"/>
             <a:r>
-              <a:rPr lang="en-US"/>
+              <a:rPr lang="en-US" smtClean="0"/>
               <a:t>Click to edit Master text styles</a:t>
             </a:r>
           </a:p>
@@ -2252,7 +2254,7 @@
           <a:p>
             <a:fld id="{5BCAD085-E8A6-8845-BD4E-CB4CCA059FC4}" type="datetimeFigureOut">
               <a:rPr lang="en-US" smtClean="0"/>
-              <a:t>3/20/2026</a:t>
+              <a:t>1/27/13</a:t>
             </a:fld>
             <a:endParaRPr lang="en-US"/>
           </a:p>
@@ -2355,9 +2357,10 @@
           </a:lstStyle>
           <a:p>
             <a:r>
-              <a:rPr lang="en-US"/>
+              <a:rPr lang="en-US" smtClean="0"/>
               <a:t>Click to edit Master title style</a:t>
             </a:r>
+            <a:endParaRPr lang="en-US"/>
           </a:p>
         </p:txBody>
       </p:sp>
@@ -2481,7 +2484,7 @@
           <a:p>
             <a:pPr lvl="0"/>
             <a:r>
-              <a:rPr lang="en-US"/>
+              <a:rPr lang="en-US" smtClean="0"/>
               <a:t>Click to edit Master text styles</a:t>
             </a:r>
           </a:p>
@@ -2504,7 +2507,7 @@
           <a:p>
             <a:fld id="{5BCAD085-E8A6-8845-BD4E-CB4CCA059FC4}" type="datetimeFigureOut">
               <a:rPr lang="en-US" smtClean="0"/>
-              <a:t>3/20/2026</a:t>
+              <a:t>1/27/13</a:t>
             </a:fld>
             <a:endParaRPr lang="en-US"/>
           </a:p>
@@ -2613,9 +2616,10 @@
           <a:lstStyle/>
           <a:p>
             <a:r>
-              <a:rPr lang="en-US"/>
+              <a:rPr lang="en-US" smtClean="0"/>
               <a:t>Click to edit Master title style</a:t>
             </a:r>
+            <a:endParaRPr lang="en-US"/>
           </a:p>
         </p:txBody>
       </p:sp>
@@ -2646,37 +2650,38 @@
           <a:p>
             <a:pPr lvl="0"/>
             <a:r>
-              <a:rPr lang="en-US"/>
+              <a:rPr lang="en-US" smtClean="0"/>
               <a:t>Click to edit Master text styles</a:t>
             </a:r>
           </a:p>
           <a:p>
             <a:pPr lvl="1"/>
             <a:r>
-              <a:rPr lang="en-US"/>
+              <a:rPr lang="en-US" smtClean="0"/>
               <a:t>Second level</a:t>
             </a:r>
           </a:p>
           <a:p>
             <a:pPr lvl="2"/>
             <a:r>
-              <a:rPr lang="en-US"/>
+              <a:rPr lang="en-US" smtClean="0"/>
               <a:t>Third level</a:t>
             </a:r>
           </a:p>
           <a:p>
             <a:pPr lvl="3"/>
             <a:r>
-              <a:rPr lang="en-US"/>
+              <a:rPr lang="en-US" smtClean="0"/>
               <a:t>Fourth level</a:t>
             </a:r>
           </a:p>
           <a:p>
             <a:pPr lvl="4"/>
             <a:r>
-              <a:rPr lang="en-US"/>
+              <a:rPr lang="en-US" smtClean="0"/>
               <a:t>Fifth level</a:t>
             </a:r>
+            <a:endParaRPr lang="en-US"/>
           </a:p>
         </p:txBody>
       </p:sp>
@@ -2715,7 +2720,7 @@
           <a:p>
             <a:fld id="{5BCAD085-E8A6-8845-BD4E-CB4CCA059FC4}" type="datetimeFigureOut">
               <a:rPr lang="en-US" smtClean="0"/>
-              <a:t>3/20/2026</a:t>
+              <a:t>1/27/13</a:t>
             </a:fld>
             <a:endParaRPr lang="en-US"/>
           </a:p>
@@ -3074,7 +3079,7 @@
 </file>
 
 <file path=ppt/slides/slide1.xml><?xml version="1.0" encoding="utf-8"?>
-<p:sld xmlns:a="http://schemas.openxmlformats.org/drawingml/2006/main" xmlns:r="http://schemas.openxmlformats.org/officeDocument/2006/relationships" xmlns:p="http://schemas.openxmlformats.org/presentationml/2006/main">
+<p:sld xmlns:a="http://schemas.openxmlformats.org/drawingml/2006/main" xmlns:ns2="http://schemas.openxmlformats.org/officeDocument/2006/relationships" xmlns:ns3="http://schemas.microsoft.com/office/drawing/2016/SVG/main" xmlns:p="http://schemas.openxmlformats.org/presentationml/2006/main">
   <p:cSld>
     <p:spTree>
       <p:nvGrpSpPr>
@@ -3082,22 +3087,15 @@
         <p:cNvGrpSpPr/>
         <p:nvPr/>
       </p:nvGrpSpPr>
-      <p:grpSpPr>
-        <a:xfrm>
-          <a:off x="0" y="0"/>
-          <a:ext cx="0" cy="0"/>
-          <a:chOff x="0" y="0"/>
-          <a:chExt cx="0" cy="0"/>
-        </a:xfrm>
-      </p:grpSpPr>
+      <p:grpSpPr/>
       <p:grpSp>
         <p:nvGrpSpPr>
-          <p:cNvPr id="24" name="Group 2"/>
+          <p:cNvPr name="Group 2" id="1"/>
           <p:cNvGrpSpPr/>
           <p:nvPr/>
         </p:nvGrpSpPr>
         <p:grpSpPr>
-          <a:xfrm>
+          <a:xfrm rot="0">
             <a:off x="0" y="0"/>
             <a:ext cx="18288000" cy="1619250"/>
             <a:chOff x="0" y="0"/>
@@ -3106,12 +3104,12 @@
         </p:grpSpPr>
         <p:sp>
           <p:nvSpPr>
-            <p:cNvPr id="25" name="Freeform 3"/>
+            <p:cNvPr name="Freeform 3" id="2"/>
             <p:cNvSpPr/>
             <p:nvPr/>
           </p:nvSpPr>
           <p:spPr>
-            <a:xfrm>
+            <a:xfrm flipH="false" flipV="false" rot="0">
               <a:off x="0" y="0"/>
               <a:ext cx="4816592" cy="426469"/>
             </a:xfrm>
@@ -3120,9 +3118,9 @@
               <a:gdLst/>
               <a:ahLst/>
               <a:cxnLst/>
-              <a:rect l="l" t="t" r="r" b="b"/>
+              <a:rect r="r" b="b" t="t" l="l"/>
               <a:pathLst>
-                <a:path w="4816592" h="426469">
+                <a:path h="426469" w="4816592">
                   <a:moveTo>
                     <a:pt x="0" y="0"/>
                   </a:moveTo>
@@ -3143,18 +3141,11 @@
               <a:srgbClr val="262262"/>
             </a:solidFill>
           </p:spPr>
-          <p:txBody>
-            <a:bodyPr/>
-            <a:lstStyle/>
-            <a:p>
-              <a:endParaRPr lang="ja-JP" altLang="en-US"/>
-            </a:p>
-          </p:txBody>
         </p:sp>
         <p:sp>
           <p:nvSpPr>
-            <p:cNvPr id="26" name="TextBox 4"/>
-            <p:cNvSpPr txBox="1"/>
+            <p:cNvPr name="TextBox 4" id="3"/>
+            <p:cNvSpPr txBox="true"/>
             <p:nvPr/>
           </p:nvSpPr>
           <p:spPr>
@@ -3167,7 +3158,7 @@
             </a:prstGeom>
           </p:spPr>
           <p:txBody>
-            <a:bodyPr lIns="50800" tIns="50800" rIns="50800" bIns="50800" rtlCol="0" anchor="ctr"/>
+            <a:bodyPr anchor="ctr" rtlCol="false" tIns="50800" lIns="50800" bIns="50800" rIns="50800"/>
             <a:lstStyle/>
             <a:p>
               <a:pPr algn="ctr">
@@ -3175,7 +3166,6 @@
                   <a:spcPts val="3456"/>
                 </a:lnSpc>
               </a:pPr>
-              <a:endParaRPr/>
             </a:p>
           </p:txBody>
         </p:sp>
@@ -3220,18 +3210,17 @@
           <a:lstStyle/>
           <a:p>
             <a:pPr algn="ctr"/>
-            <a:endParaRPr/>
           </a:p>
         </p:txBody>
       </p:sp>
       <p:grpSp>
         <p:nvGrpSpPr>
-          <p:cNvPr id="4" name="Group 18"/>
+          <p:cNvPr name="Group 18" id="4"/>
           <p:cNvGrpSpPr/>
           <p:nvPr/>
         </p:nvGrpSpPr>
         <p:grpSpPr>
-          <a:xfrm>
+          <a:xfrm rot="0">
             <a:off x="-769371" y="0"/>
             <a:ext cx="3167383" cy="1619250"/>
             <a:chOff x="0" y="0"/>
@@ -3240,12 +3229,12 @@
         </p:grpSpPr>
         <p:sp>
           <p:nvSpPr>
-            <p:cNvPr id="27" name="Freeform 19"/>
+            <p:cNvPr name="Freeform 19" id="5"/>
             <p:cNvSpPr/>
             <p:nvPr/>
           </p:nvSpPr>
           <p:spPr>
-            <a:xfrm>
+            <a:xfrm flipH="false" flipV="false" rot="0">
               <a:off x="0" y="0"/>
               <a:ext cx="979343" cy="500666"/>
             </a:xfrm>
@@ -3254,9 +3243,9 @@
               <a:gdLst/>
               <a:ahLst/>
               <a:cxnLst/>
-              <a:rect l="l" t="t" r="r" b="b"/>
+              <a:rect r="r" b="b" t="t" l="l"/>
               <a:pathLst>
-                <a:path w="979343" h="500666">
+                <a:path h="500666" w="979343">
                   <a:moveTo>
                     <a:pt x="203200" y="0"/>
                   </a:moveTo>
@@ -3280,18 +3269,11 @@
               <a:srgbClr val="1B75BC"/>
             </a:solidFill>
           </p:spPr>
-          <p:txBody>
-            <a:bodyPr/>
-            <a:lstStyle/>
-            <a:p>
-              <a:endParaRPr lang="ja-JP" altLang="en-US"/>
-            </a:p>
-          </p:txBody>
         </p:sp>
         <p:sp>
           <p:nvSpPr>
-            <p:cNvPr id="28" name="TextBox 20"/>
-            <p:cNvSpPr txBox="1"/>
+            <p:cNvPr name="TextBox 20" id="6"/>
+            <p:cNvSpPr txBox="true"/>
             <p:nvPr/>
           </p:nvSpPr>
           <p:spPr>
@@ -3304,7 +3286,7 @@
             </a:prstGeom>
           </p:spPr>
           <p:txBody>
-            <a:bodyPr lIns="50800" tIns="50800" rIns="50800" bIns="50800" rtlCol="0" anchor="ctr"/>
+            <a:bodyPr anchor="ctr" rtlCol="false" tIns="50800" lIns="50800" bIns="50800" rIns="50800"/>
             <a:lstStyle/>
             <a:p>
               <a:pPr algn="ctr">
@@ -3312,7 +3294,6 @@
                   <a:spcPts val="3456"/>
                 </a:lnSpc>
               </a:pPr>
-              <a:endParaRPr/>
             </a:p>
           </p:txBody>
         </p:sp>
@@ -3341,7 +3322,7 @@
           <a:p>
             <a:pPr algn="l"/>
             <a:r>
-              <a:rPr sz="6000" b="1" dirty="0">
+              <a:rPr sz="6000" b="1">
                 <a:solidFill>
                   <a:srgbClr val="FFFFFF"/>
                 </a:solidFill>
@@ -3354,7 +3335,7 @@
       </p:sp>
       <p:sp>
         <p:nvSpPr>
-          <p:cNvPr id="29" name="TextBox 3"/>
+          <p:cNvPr id="4" name="TextBox 3"/>
           <p:cNvSpPr txBox="1"/>
           <p:nvPr/>
         </p:nvSpPr>
@@ -3422,14 +3403,107 @@
           </a:p>
         </p:txBody>
       </p:sp>
-      <p:sp>
-        <p:nvSpPr>
-          <p:cNvPr id="10" name="Freeform 21"/>
+      <p:grpSp>
+        <p:nvGrpSpPr>
+          <p:cNvPr name="Group 5" id="7"/>
+          <p:cNvGrpSpPr/>
+          <p:nvPr/>
+        </p:nvGrpSpPr>
+        <p:grpSpPr>
+          <a:xfrm rot="0">
+            <a:off x="2176210" y="2367783"/>
+            <a:ext cx="2567568" cy="2567568"/>
+            <a:chOff x="0" y="0"/>
+            <a:chExt cx="812800" cy="812800"/>
+          </a:xfrm>
+        </p:grpSpPr>
+        <p:sp>
+          <p:nvSpPr>
+            <p:cNvPr name="Freeform 6" id="8"/>
+            <p:cNvSpPr/>
+            <p:nvPr/>
+          </p:nvSpPr>
+          <p:spPr>
+            <a:xfrm flipH="false" flipV="false" rot="0">
+              <a:off x="0" y="0"/>
+              <a:ext cx="812800" cy="812800"/>
+            </a:xfrm>
+            <a:custGeom>
+              <a:avLst/>
+              <a:gdLst/>
+              <a:ahLst/>
+              <a:cxnLst/>
+              <a:rect r="r" b="b" t="t" l="l"/>
+              <a:pathLst>
+                <a:path h="812800" w="812800">
+                  <a:moveTo>
+                    <a:pt x="406400" y="0"/>
+                  </a:moveTo>
+                  <a:cubicBezTo>
+                    <a:pt x="181951" y="0"/>
+                    <a:pt x="0" y="181951"/>
+                    <a:pt x="0" y="406400"/>
+                  </a:cubicBezTo>
+                  <a:cubicBezTo>
+                    <a:pt x="0" y="630849"/>
+                    <a:pt x="181951" y="812800"/>
+                    <a:pt x="406400" y="812800"/>
+                  </a:cubicBezTo>
+                  <a:cubicBezTo>
+                    <a:pt x="630849" y="812800"/>
+                    <a:pt x="812800" y="630849"/>
+                    <a:pt x="812800" y="406400"/>
+                  </a:cubicBezTo>
+                  <a:cubicBezTo>
+                    <a:pt x="812800" y="181951"/>
+                    <a:pt x="630849" y="0"/>
+                    <a:pt x="406400" y="0"/>
+                  </a:cubicBezTo>
+                  <a:close/>
+                </a:path>
+              </a:pathLst>
+            </a:custGeom>
+            <a:solidFill>
+              <a:srgbClr val="00AEEF"/>
+            </a:solidFill>
+          </p:spPr>
+        </p:sp>
+        <p:sp>
+          <p:nvSpPr>
+            <p:cNvPr name="TextBox 7" id="9"/>
+            <p:cNvSpPr txBox="true"/>
+            <p:nvPr/>
+          </p:nvSpPr>
+          <p:spPr>
+            <a:xfrm>
+              <a:off x="76200" y="-209550"/>
+              <a:ext cx="660400" cy="946150"/>
+            </a:xfrm>
+            <a:prstGeom prst="rect">
+              <a:avLst/>
+            </a:prstGeom>
+          </p:spPr>
+          <p:txBody>
+            <a:bodyPr anchor="ctr" rtlCol="false" tIns="50800" lIns="50800" bIns="50800" rIns="50800"/>
+            <a:lstStyle/>
+            <a:p>
+              <a:pPr algn="ctr">
+                <a:lnSpc>
+                  <a:spcPts val="3456"/>
+                </a:lnSpc>
+              </a:pPr>
+            </a:p>
+          </p:txBody>
+        </p:sp>
+      </p:grpSp>
+      <p:sp>
+        <p:nvSpPr>
+          <p:cNvPr name="Freeform 21" id="10"/>
           <p:cNvSpPr/>
           <p:nvPr/>
         </p:nvSpPr>
         <p:spPr>
-          <a:xfrm>
+          <a:xfrm flipH="false" flipV="false" rot="0">
             <a:off x="2802769" y="2994342"/>
             <a:ext cx="1314450" cy="1314450"/>
           </a:xfrm>
@@ -3438,9 +3512,9 @@
             <a:gdLst/>
             <a:ahLst/>
             <a:cxnLst/>
-            <a:rect l="l" t="t" r="r" b="b"/>
+            <a:rect r="r" b="b" t="t" l="l"/>
             <a:pathLst>
-              <a:path w="1314450" h="1314450">
+              <a:path h="1314450" w="1314450">
                 <a:moveTo>
                   <a:pt x="0" y="0"/>
                 </a:moveTo>
@@ -3461,28 +3535,120 @@
             </a:pathLst>
           </a:custGeom>
           <a:blipFill>
-            <a:blip/>
+            <a:blip ns2:embed="rId6">
+              <a:extLst>
+                <a:ext uri="{96DAC541-7B7A-43D3-8B79-37D633B846F1}">
+                  <ns3:svgBlip ns2:embed="rId7"/>
+                </a:ext>
+              </a:extLst>
+            </a:blip>
             <a:stretch>
-              <a:fillRect/>
+              <a:fillRect l="0" t="0" r="0" b="0"/>
             </a:stretch>
           </a:blipFill>
         </p:spPr>
-        <p:txBody>
-          <a:bodyPr/>
-          <a:lstStyle/>
-          <a:p>
-            <a:endParaRPr lang="ja-JP" altLang="en-US"/>
-          </a:p>
-        </p:txBody>
-      </p:sp>
-      <p:sp>
-        <p:nvSpPr>
-          <p:cNvPr id="14" name="Freeform 11"/>
+      </p:sp>
+      <p:grpSp>
+        <p:nvGrpSpPr>
+          <p:cNvPr name="Group 8" id="11"/>
+          <p:cNvGrpSpPr/>
+          <p:nvPr/>
+        </p:nvGrpSpPr>
+        <p:grpSpPr>
+          <a:xfrm rot="0">
+            <a:off x="7862008" y="2367783"/>
+            <a:ext cx="2567568" cy="2567568"/>
+            <a:chOff x="0" y="0"/>
+            <a:chExt cx="812800" cy="812800"/>
+          </a:xfrm>
+        </p:grpSpPr>
+        <p:sp>
+          <p:nvSpPr>
+            <p:cNvPr name="Freeform 9" id="12"/>
+            <p:cNvSpPr/>
+            <p:nvPr/>
+          </p:nvSpPr>
+          <p:spPr>
+            <a:xfrm flipH="false" flipV="false" rot="0">
+              <a:off x="0" y="0"/>
+              <a:ext cx="812800" cy="812800"/>
+            </a:xfrm>
+            <a:custGeom>
+              <a:avLst/>
+              <a:gdLst/>
+              <a:ahLst/>
+              <a:cxnLst/>
+              <a:rect r="r" b="b" t="t" l="l"/>
+              <a:pathLst>
+                <a:path h="812800" w="812800">
+                  <a:moveTo>
+                    <a:pt x="406400" y="0"/>
+                  </a:moveTo>
+                  <a:cubicBezTo>
+                    <a:pt x="181951" y="0"/>
+                    <a:pt x="0" y="181951"/>
+                    <a:pt x="0" y="406400"/>
+                  </a:cubicBezTo>
+                  <a:cubicBezTo>
+                    <a:pt x="0" y="630849"/>
+                    <a:pt x="181951" y="812800"/>
+                    <a:pt x="406400" y="812800"/>
+                  </a:cubicBezTo>
+                  <a:cubicBezTo>
+                    <a:pt x="630849" y="812800"/>
+                    <a:pt x="812800" y="630849"/>
+                    <a:pt x="812800" y="406400"/>
+                  </a:cubicBezTo>
+                  <a:cubicBezTo>
+                    <a:pt x="812800" y="181951"/>
+                    <a:pt x="630849" y="0"/>
+                    <a:pt x="406400" y="0"/>
+                  </a:cubicBezTo>
+                  <a:close/>
+                </a:path>
+              </a:pathLst>
+            </a:custGeom>
+            <a:solidFill>
+              <a:srgbClr val="00AEEF"/>
+            </a:solidFill>
+          </p:spPr>
+        </p:sp>
+        <p:sp>
+          <p:nvSpPr>
+            <p:cNvPr name="TextBox 10" id="13"/>
+            <p:cNvSpPr txBox="true"/>
+            <p:nvPr/>
+          </p:nvSpPr>
+          <p:spPr>
+            <a:xfrm>
+              <a:off x="76200" y="-209550"/>
+              <a:ext cx="660400" cy="946150"/>
+            </a:xfrm>
+            <a:prstGeom prst="rect">
+              <a:avLst/>
+            </a:prstGeom>
+          </p:spPr>
+          <p:txBody>
+            <a:bodyPr anchor="ctr" rtlCol="false" tIns="50800" lIns="50800" bIns="50800" rIns="50800"/>
+            <a:lstStyle/>
+            <a:p>
+              <a:pPr algn="ctr">
+                <a:lnSpc>
+                  <a:spcPts val="3456"/>
+                </a:lnSpc>
+              </a:pPr>
+            </a:p>
+          </p:txBody>
+        </p:sp>
+      </p:grpSp>
+      <p:sp>
+        <p:nvSpPr>
+          <p:cNvPr name="Freeform 11" id="14"/>
           <p:cNvSpPr/>
           <p:nvPr/>
         </p:nvSpPr>
         <p:spPr>
-          <a:xfrm>
+          <a:xfrm flipH="false" flipV="false" rot="0">
             <a:off x="8502855" y="3049497"/>
             <a:ext cx="1285875" cy="1250806"/>
           </a:xfrm>
@@ -3491,9 +3657,9 @@
             <a:gdLst/>
             <a:ahLst/>
             <a:cxnLst/>
-            <a:rect l="l" t="t" r="r" b="b"/>
+            <a:rect r="r" b="b" t="t" l="l"/>
             <a:pathLst>
-              <a:path w="1285875" h="1250806">
+              <a:path h="1250806" w="1285875">
                 <a:moveTo>
                   <a:pt x="0" y="0"/>
                 </a:moveTo>
@@ -3514,28 +3680,120 @@
             </a:pathLst>
           </a:custGeom>
           <a:blipFill>
-            <a:blip/>
+            <a:blip ns2:embed="rId2">
+              <a:extLst>
+                <a:ext uri="{96DAC541-7B7A-43D3-8B79-37D633B846F1}">
+                  <ns3:svgBlip ns2:embed="rId3"/>
+                </a:ext>
+              </a:extLst>
+            </a:blip>
             <a:stretch>
-              <a:fillRect/>
+              <a:fillRect l="0" t="0" r="0" b="0"/>
             </a:stretch>
           </a:blipFill>
         </p:spPr>
-        <p:txBody>
-          <a:bodyPr/>
-          <a:lstStyle/>
-          <a:p>
-            <a:endParaRPr lang="ja-JP" altLang="en-US"/>
-          </a:p>
-        </p:txBody>
-      </p:sp>
-      <p:sp>
-        <p:nvSpPr>
-          <p:cNvPr id="18" name="Freeform 15"/>
+      </p:sp>
+      <p:grpSp>
+        <p:nvGrpSpPr>
+          <p:cNvPr name="Group 12" id="15"/>
+          <p:cNvGrpSpPr/>
+          <p:nvPr/>
+        </p:nvGrpSpPr>
+        <p:grpSpPr>
+          <a:xfrm rot="0">
+            <a:off x="13544222" y="2367783"/>
+            <a:ext cx="2567568" cy="2567568"/>
+            <a:chOff x="0" y="0"/>
+            <a:chExt cx="812800" cy="812800"/>
+          </a:xfrm>
+        </p:grpSpPr>
+        <p:sp>
+          <p:nvSpPr>
+            <p:cNvPr name="Freeform 13" id="16"/>
+            <p:cNvSpPr/>
+            <p:nvPr/>
+          </p:nvSpPr>
+          <p:spPr>
+            <a:xfrm flipH="false" flipV="false" rot="0">
+              <a:off x="0" y="0"/>
+              <a:ext cx="812800" cy="812800"/>
+            </a:xfrm>
+            <a:custGeom>
+              <a:avLst/>
+              <a:gdLst/>
+              <a:ahLst/>
+              <a:cxnLst/>
+              <a:rect r="r" b="b" t="t" l="l"/>
+              <a:pathLst>
+                <a:path h="812800" w="812800">
+                  <a:moveTo>
+                    <a:pt x="406400" y="0"/>
+                  </a:moveTo>
+                  <a:cubicBezTo>
+                    <a:pt x="181951" y="0"/>
+                    <a:pt x="0" y="181951"/>
+                    <a:pt x="0" y="406400"/>
+                  </a:cubicBezTo>
+                  <a:cubicBezTo>
+                    <a:pt x="0" y="630849"/>
+                    <a:pt x="181951" y="812800"/>
+                    <a:pt x="406400" y="812800"/>
+                  </a:cubicBezTo>
+                  <a:cubicBezTo>
+                    <a:pt x="630849" y="812800"/>
+                    <a:pt x="812800" y="630849"/>
+                    <a:pt x="812800" y="406400"/>
+                  </a:cubicBezTo>
+                  <a:cubicBezTo>
+                    <a:pt x="812800" y="181951"/>
+                    <a:pt x="630849" y="0"/>
+                    <a:pt x="406400" y="0"/>
+                  </a:cubicBezTo>
+                  <a:close/>
+                </a:path>
+              </a:pathLst>
+            </a:custGeom>
+            <a:solidFill>
+              <a:srgbClr val="00AEEF"/>
+            </a:solidFill>
+          </p:spPr>
+        </p:sp>
+        <p:sp>
+          <p:nvSpPr>
+            <p:cNvPr name="TextBox 14" id="17"/>
+            <p:cNvSpPr txBox="true"/>
+            <p:nvPr/>
+          </p:nvSpPr>
+          <p:spPr>
+            <a:xfrm>
+              <a:off x="76200" y="-209550"/>
+              <a:ext cx="660400" cy="946150"/>
+            </a:xfrm>
+            <a:prstGeom prst="rect">
+              <a:avLst/>
+            </a:prstGeom>
+          </p:spPr>
+          <p:txBody>
+            <a:bodyPr anchor="ctr" rtlCol="false" tIns="50800" lIns="50800" bIns="50800" rIns="50800"/>
+            <a:lstStyle/>
+            <a:p>
+              <a:pPr algn="ctr">
+                <a:lnSpc>
+                  <a:spcPts val="3456"/>
+                </a:lnSpc>
+              </a:pPr>
+            </a:p>
+          </p:txBody>
+        </p:sp>
+      </p:grpSp>
+      <p:sp>
+        <p:nvSpPr>
+          <p:cNvPr name="Freeform 15" id="18"/>
           <p:cNvSpPr/>
           <p:nvPr/>
         </p:nvSpPr>
         <p:spPr>
-          <a:xfrm>
+          <a:xfrm flipH="false" flipV="false" rot="0">
             <a:off x="14185068" y="3049497"/>
             <a:ext cx="1285875" cy="1288217"/>
           </a:xfrm>
@@ -3544,9 +3802,9 @@
             <a:gdLst/>
             <a:ahLst/>
             <a:cxnLst/>
-            <a:rect l="l" t="t" r="r" b="b"/>
+            <a:rect r="r" b="b" t="t" l="l"/>
             <a:pathLst>
-              <a:path w="1285875" h="1288217">
+              <a:path h="1288217" w="1285875">
                 <a:moveTo>
                   <a:pt x="0" y="0"/>
                 </a:moveTo>
@@ -3567,19 +3825,66 @@
             </a:pathLst>
           </a:custGeom>
           <a:blipFill>
-            <a:blip/>
+            <a:blip ns2:embed="rId4">
+              <a:extLst>
+                <a:ext uri="{96DAC541-7B7A-43D3-8B79-37D633B846F1}">
+                  <ns3:svgBlip ns2:embed="rId5"/>
+                </a:ext>
+              </a:extLst>
+            </a:blip>
             <a:stretch>
-              <a:fillRect/>
+              <a:fillRect l="0" t="0" r="0" b="0"/>
             </a:stretch>
           </a:blipFill>
         </p:spPr>
-        <p:txBody>
-          <a:bodyPr/>
-          <a:lstStyle/>
-          <a:p>
-            <a:endParaRPr lang="ja-JP" altLang="en-US"/>
-          </a:p>
-        </p:txBody>
+      </p:sp>
+      <p:sp>
+        <p:nvSpPr>
+          <p:cNvPr name="AutoShape 16" id="19"/>
+          <p:cNvSpPr/>
+          <p:nvPr/>
+        </p:nvSpPr>
+        <p:spPr>
+          <a:xfrm>
+            <a:off x="6302231" y="2233969"/>
+            <a:ext cx="0" cy="7438313"/>
+          </a:xfrm>
+          <a:prstGeom prst="line">
+            <a:avLst/>
+          </a:prstGeom>
+          <a:ln cap="flat" w="19050">
+            <a:solidFill>
+              <a:srgbClr val="D9D9D9"/>
+            </a:solidFill>
+            <a:prstDash val="sysDash"/>
+            <a:headEnd type="none" len="sm" w="sm"/>
+            <a:tailEnd type="none" len="sm" w="sm"/>
+          </a:ln>
+        </p:spPr>
+      </p:sp>
+      <p:sp>
+        <p:nvSpPr>
+          <p:cNvPr name="AutoShape 17" id="20"/>
+          <p:cNvSpPr/>
+          <p:nvPr/>
+        </p:nvSpPr>
+        <p:spPr>
+          <a:xfrm>
+            <a:off x="11989353" y="2233969"/>
+            <a:ext cx="0" cy="7438313"/>
+          </a:xfrm>
+          <a:prstGeom prst="line">
+            <a:avLst/>
+          </a:prstGeom>
+          <a:ln cap="flat" w="19050">
+            <a:solidFill>
+              <a:srgbClr val="D9D9D9"/>
+            </a:solidFill>
+            <a:prstDash val="sysDash"/>
+            <a:headEnd type="none" len="sm" w="sm"/>
+            <a:tailEnd type="none" len="sm" w="sm"/>
+          </a:ln>
+        </p:spPr>
       </p:sp>
       <p:sp>
         <p:nvSpPr>
@@ -3623,13 +3928,12 @@
           <a:lstStyle/>
           <a:p>
             <a:pPr algn="ctr"/>
-            <a:endParaRPr/>
-          </a:p>
-        </p:txBody>
-      </p:sp>
-      <p:sp>
-        <p:nvSpPr>
-          <p:cNvPr id="36" name="TextBox 6"/>
+          </a:p>
+        </p:txBody>
+      </p:sp>
+      <p:sp>
+        <p:nvSpPr>
+          <p:cNvPr id="7" name="TextBox 6"/>
           <p:cNvSpPr txBox="1"/>
           <p:nvPr/>
         </p:nvSpPr>
@@ -3644,141 +3948,49 @@
           <a:noFill/>
         </p:spPr>
         <p:txBody>
-          <a:bodyPr wrap="square">
+          <a:bodyPr wrap="square" anchor="ctr">
             <a:spAutoFit/>
           </a:bodyPr>
           <a:lstStyle/>
           <a:p>
-            <a:pPr>
-              <a:spcAft>
-                <a:spcPts val="400"/>
-              </a:spcAft>
-            </a:pPr>
-            <a:r>
-              <a:rPr sz="1600" b="1" dirty="0">
-                <a:solidFill>
-                  <a:srgbClr val="FFFFFF"/>
-                </a:solidFill>
-                <a:latin typeface="BIZ UDPGothic"/>
-              </a:rPr>
-              <a:t>GitHub API / </a:t>
-            </a:r>
-            <a:r>
-              <a:rPr sz="1600" b="1" dirty="0" err="1">
-                <a:solidFill>
-                  <a:srgbClr val="FFFFFF"/>
-                </a:solidFill>
-                <a:latin typeface="BIZ UDPGothic"/>
-              </a:rPr>
-              <a:t>Octokit</a:t>
-            </a:r>
-            <a:endParaRPr sz="1600" b="1" dirty="0">
-              <a:solidFill>
-                <a:srgbClr val="FFFFFF"/>
-              </a:solidFill>
-              <a:latin typeface="BIZ UDPGothic"/>
-            </a:endParaRPr>
-          </a:p>
-          <a:p>
-            <a:pPr>
-              <a:spcAft>
-                <a:spcPts val="400"/>
-              </a:spcAft>
-            </a:pPr>
-            <a:endParaRPr sz="1600" b="1" dirty="0">
-              <a:solidFill>
-                <a:srgbClr val="FFFFFF"/>
-              </a:solidFill>
-              <a:latin typeface="BIZ UDPGothic"/>
-            </a:endParaRPr>
-          </a:p>
-          <a:p>
-            <a:pPr>
-              <a:spcAft>
-                <a:spcPts val="400"/>
-              </a:spcAft>
-            </a:pPr>
-            <a:r>
-              <a:rPr sz="1600" b="0" dirty="0" err="1">
-                <a:solidFill>
-                  <a:srgbClr val="FFFFFF"/>
-                </a:solidFill>
-                <a:latin typeface="BIZ UDPGothic"/>
-              </a:rPr>
+            <a:pPr algn="ctr"/>
+            <a:r>
+              <a:rPr lang="ja-JP" sz="1400" b="1"/>
+              <a:t>GitHub API / Octokit</a:t>
+            </a:r>
+            <a:endParaRPr lang="ja-JP" sz="1400"/>
+          </a:p>
+          <a:p>
+            <a:pPr/>
+            <a:r>
+              <a:rPr lang="ja-JP" sz="1400"/>
               <a:t>リポジトリ情報を取得</a:t>
             </a:r>
-            <a:endParaRPr sz="1600" b="0" dirty="0">
-              <a:solidFill>
-                <a:srgbClr val="FFFFFF"/>
-              </a:solidFill>
-              <a:latin typeface="BIZ UDPGothic"/>
-            </a:endParaRPr>
-          </a:p>
-          <a:p>
-            <a:pPr>
-              <a:spcAft>
-                <a:spcPts val="400"/>
-              </a:spcAft>
-            </a:pPr>
-            <a:r>
-              <a:rPr sz="1600" b="0" dirty="0">
-                <a:solidFill>
-                  <a:srgbClr val="FFFFFF"/>
-                </a:solidFill>
-                <a:latin typeface="BIZ UDPGothic"/>
-              </a:rPr>
-              <a:t>・</a:t>
-            </a:r>
-            <a:r>
-              <a:rPr sz="1600" b="0" dirty="0" err="1">
-                <a:solidFill>
-                  <a:srgbClr val="FFFFFF"/>
-                </a:solidFill>
-                <a:latin typeface="BIZ UDPGothic"/>
-              </a:rPr>
-              <a:t>ファイル構造</a:t>
-            </a:r>
-            <a:r>
-              <a:rPr sz="1600" b="0" dirty="0">
-                <a:solidFill>
-                  <a:srgbClr val="FFFFFF"/>
-                </a:solidFill>
-                <a:latin typeface="BIZ UDPGothic"/>
-              </a:rPr>
-              <a:t> / README</a:t>
-            </a:r>
-          </a:p>
-          <a:p>
-            <a:pPr>
-              <a:spcAft>
-                <a:spcPts val="400"/>
-              </a:spcAft>
-            </a:pPr>
-            <a:r>
-              <a:rPr sz="1600" b="0" dirty="0">
-                <a:solidFill>
-                  <a:srgbClr val="FFFFFF"/>
-                </a:solidFill>
-                <a:latin typeface="BIZ UDPGothic"/>
-              </a:rPr>
-              <a:t>・Issue (title, body)</a:t>
-            </a:r>
-          </a:p>
-          <a:p>
-            <a:pPr>
-              <a:spcAft>
-                <a:spcPts val="400"/>
-              </a:spcAft>
-            </a:pPr>
-            <a:r>
-              <a:rPr sz="1600" b="0" dirty="0">
-                <a:solidFill>
-                  <a:srgbClr val="FFFFFF"/>
-                </a:solidFill>
-                <a:latin typeface="BIZ UDPGothic"/>
-              </a:rPr>
+            <a:endParaRPr lang="ja-JP" sz="1400"/>
+          </a:p>
+          <a:p>
+            <a:pPr/>
+            <a:r>
+              <a:rPr lang="ja-JP" sz="1400"/>
+              <a:t>・ファイル構造 / README</a:t>
+            </a:r>
+            <a:endParaRPr lang="ja-JP" sz="1400"/>
+          </a:p>
+          <a:p>
+            <a:pPr/>
+            <a:r>
+              <a:rPr lang="ja-JP" sz="1400"/>
+              <a:t>・Issue</a:t>
+            </a:r>
+            <a:endParaRPr lang="ja-JP" sz="1400"/>
+          </a:p>
+          <a:p>
+            <a:pPr/>
+            <a:r>
+              <a:rPr lang="ja-JP" sz="1400"/>
               <a:t>・PR diff</a:t>
             </a:r>
+            <a:endParaRPr lang="ja-JP" sz="1400"/>
           </a:p>
         </p:txBody>
       </p:sp>
@@ -3859,13 +4071,12 @@
           <a:lstStyle/>
           <a:p>
             <a:pPr algn="ctr"/>
-            <a:endParaRPr/>
-          </a:p>
-        </p:txBody>
-      </p:sp>
-      <p:sp>
-        <p:nvSpPr>
-          <p:cNvPr id="37" name="TextBox 9"/>
+          </a:p>
+        </p:txBody>
+      </p:sp>
+      <p:sp>
+        <p:nvSpPr>
+          <p:cNvPr id="10" name="TextBox 9"/>
           <p:cNvSpPr txBox="1"/>
           <p:nvPr/>
         </p:nvSpPr>
@@ -3880,76 +4091,39 @@
           <a:noFill/>
         </p:spPr>
         <p:txBody>
-          <a:bodyPr wrap="square">
+          <a:bodyPr wrap="square" anchor="ctr">
             <a:spAutoFit/>
           </a:bodyPr>
           <a:lstStyle/>
           <a:p>
-            <a:pPr>
-              <a:spcAft>
-                <a:spcPts val="400"/>
-              </a:spcAft>
-            </a:pPr>
-            <a:r>
-              <a:rPr sz="1600" b="1">
-                <a:solidFill>
-                  <a:srgbClr val="FFFFFF"/>
-                </a:solidFill>
-                <a:latin typeface="BIZ UDPGothic"/>
-              </a:rPr>
+            <a:pPr algn="ctr"/>
+            <a:r>
+              <a:rPr lang="ja-JP" sz="1500" b="1"/>
               <a:t>Gemini 2.5 Flash</a:t>
             </a:r>
-          </a:p>
-          <a:p>
-            <a:pPr>
-              <a:spcAft>
-                <a:spcPts val="400"/>
-              </a:spcAft>
-            </a:pPr>
-            <a:endParaRPr sz="1600" b="1">
-              <a:solidFill>
-                <a:srgbClr val="FFFFFF"/>
-              </a:solidFill>
-              <a:latin typeface="BIZ UDPGothic"/>
-            </a:endParaRPr>
-          </a:p>
-          <a:p>
-            <a:pPr>
-              <a:spcAft>
-                <a:spcPts val="400"/>
-              </a:spcAft>
-            </a:pPr>
-            <a:r>
-              <a:rPr sz="1600" b="0">
-                <a:solidFill>
-                  <a:srgbClr val="FFFFFF"/>
-                </a:solidFill>
-                <a:latin typeface="BIZ UDPGothic"/>
-              </a:rPr>
+            <a:endParaRPr lang="ja-JP" sz="1500"/>
+          </a:p>
+          <a:p>
+            <a:pPr/>
+            <a:r>
+              <a:rPr lang="ja-JP" sz="1500"/>
               <a:t>初心者向けに構造化</a:t>
             </a:r>
-          </a:p>
-          <a:p>
-            <a:pPr>
-              <a:spcAft>
-                <a:spcPts val="400"/>
-              </a:spcAft>
-            </a:pPr>
-            <a:r>
-              <a:rPr sz="1600" b="0">
-                <a:solidFill>
-                  <a:srgbClr val="FFFFFF"/>
-                </a:solidFill>
-                <a:latin typeface="BIZ UDPGothic"/>
-              </a:rPr>
+            <a:endParaRPr lang="ja-JP" sz="1500"/>
+          </a:p>
+          <a:p>
+            <a:pPr/>
+            <a:r>
+              <a:rPr lang="ja-JP" sz="1500"/>
               <a:t>→ JSON出力</a:t>
             </a:r>
-          </a:p>
-        </p:txBody>
-      </p:sp>
-      <p:sp>
-        <p:nvSpPr>
-          <p:cNvPr id="38" name="TextBox 10"/>
+            <a:endParaRPr lang="ja-JP" sz="1500"/>
+          </a:p>
+        </p:txBody>
+      </p:sp>
+      <p:sp>
+        <p:nvSpPr>
+          <p:cNvPr id="11" name="TextBox 10"/>
           <p:cNvSpPr txBox="1"/>
           <p:nvPr/>
         </p:nvSpPr>
@@ -4024,7 +4198,6 @@
           <a:lstStyle/>
           <a:p>
             <a:pPr algn="ctr"/>
-            <a:endParaRPr/>
           </a:p>
         </p:txBody>
       </p:sp>
@@ -4045,108 +4218,55 @@
           <a:noFill/>
         </p:spPr>
         <p:txBody>
-          <a:bodyPr wrap="square">
+          <a:bodyPr wrap="square" anchor="ctr">
             <a:spAutoFit/>
           </a:bodyPr>
           <a:lstStyle/>
           <a:p>
-            <a:pPr>
-              <a:spcAft>
-                <a:spcPts val="400"/>
-              </a:spcAft>
-            </a:pPr>
-            <a:r>
-              <a:rPr sz="1600" b="1">
-                <a:solidFill>
-                  <a:srgbClr val="FFFFFF"/>
-                </a:solidFill>
-                <a:latin typeface="BIZ UDPGothic"/>
-              </a:rPr>
+            <a:pPr algn="ctr"/>
+            <a:r>
+              <a:rPr lang="ja-JP" sz="1400" b="1"/>
               <a:t>初心者向けUI</a:t>
             </a:r>
-          </a:p>
-          <a:p>
-            <a:pPr>
-              <a:spcAft>
-                <a:spcPts val="400"/>
-              </a:spcAft>
-            </a:pPr>
-            <a:endParaRPr sz="1600" b="1">
-              <a:solidFill>
-                <a:srgbClr val="FFFFFF"/>
-              </a:solidFill>
-              <a:latin typeface="BIZ UDPGothic"/>
-            </a:endParaRPr>
-          </a:p>
-          <a:p>
-            <a:pPr>
-              <a:spcAft>
-                <a:spcPts val="400"/>
-              </a:spcAft>
-            </a:pPr>
-            <a:r>
-              <a:rPr sz="1600" b="0">
-                <a:solidFill>
-                  <a:srgbClr val="FFFFFF"/>
-                </a:solidFill>
-                <a:latin typeface="BIZ UDPGothic"/>
-              </a:rPr>
+            <a:endParaRPr lang="ja-JP" sz="1400"/>
+          </a:p>
+          <a:p>
+            <a:pPr/>
+            <a:r>
+              <a:rPr lang="ja-JP" sz="1400"/>
               <a:t>わかりやすく表示</a:t>
             </a:r>
-          </a:p>
-          <a:p>
-            <a:pPr>
-              <a:spcAft>
-                <a:spcPts val="400"/>
-              </a:spcAft>
-            </a:pPr>
-            <a:r>
-              <a:rPr sz="1600" b="0">
-                <a:solidFill>
-                  <a:srgbClr val="FFFFFF"/>
-                </a:solidFill>
-                <a:latin typeface="BIZ UDPGothic"/>
-              </a:rPr>
+            <a:endParaRPr lang="ja-JP" sz="1400"/>
+          </a:p>
+          <a:p>
+            <a:pPr/>
+            <a:r>
+              <a:rPr lang="ja-JP" sz="1400"/>
               <a:t>・極小ステップ</a:t>
             </a:r>
-          </a:p>
-          <a:p>
-            <a:pPr>
-              <a:spcAft>
-                <a:spcPts val="400"/>
-              </a:spcAft>
-            </a:pPr>
-            <a:r>
-              <a:rPr sz="1600" b="0">
-                <a:solidFill>
-                  <a:srgbClr val="FFFFFF"/>
-                </a:solidFill>
-                <a:latin typeface="BIZ UDPGothic"/>
-              </a:rPr>
+            <a:endParaRPr lang="ja-JP" sz="1400"/>
+          </a:p>
+          <a:p>
+            <a:pPr/>
+            <a:r>
+              <a:rPr lang="ja-JP" sz="1400"/>
               <a:t>・公式ドキュメントリンク</a:t>
             </a:r>
-          </a:p>
-          <a:p>
-            <a:pPr>
-              <a:spcAft>
-                <a:spcPts val="400"/>
-              </a:spcAft>
-            </a:pPr>
-            <a:r>
-              <a:rPr sz="1600" b="0">
-                <a:solidFill>
-                  <a:srgbClr val="FFFFFF"/>
-                </a:solidFill>
-                <a:latin typeface="BIZ UDPGothic"/>
-              </a:rPr>
+            <a:endParaRPr lang="ja-JP" sz="1400"/>
+          </a:p>
+          <a:p>
+            <a:pPr/>
+            <a:r>
+              <a:rPr lang="ja-JP" sz="1400"/>
               <a:t>・コマンドコピペ</a:t>
             </a:r>
-          </a:p>
-        </p:txBody>
-      </p:sp>
-      <p:sp>
-        <p:nvSpPr>
-          <p:cNvPr id="39" name="Oval 13"/>
+            <a:endParaRPr lang="ja-JP" sz="1400"/>
+          </a:p>
+        </p:txBody>
+      </p:sp>
+      <p:sp>
+        <p:nvSpPr>
+          <p:cNvPr id="14" name="Oval 13"/>
           <p:cNvSpPr/>
           <p:nvPr/>
         </p:nvSpPr>
@@ -4180,12 +4300,12 @@
           </a:fontRef>
         </p:style>
         <p:txBody>
-          <a:bodyPr wrap="none" rtlCol="0" anchor="ctr"/>
+          <a:bodyPr rtlCol="0" anchor="ctr" wrap="none"/>
           <a:lstStyle/>
           <a:p>
             <a:pPr algn="ctr"/>
             <a:r>
-              <a:rPr sz="1600" b="1">
+              <a:rPr sz="1400" b="1">
                 <a:solidFill>
                   <a:srgbClr val="FFFFFF"/>
                 </a:solidFill>
@@ -4198,7 +4318,7 @@
       </p:sp>
       <p:sp>
         <p:nvSpPr>
-          <p:cNvPr id="40" name="TextBox 14"/>
+          <p:cNvPr id="15" name="TextBox 14"/>
           <p:cNvSpPr txBox="1"/>
           <p:nvPr/>
         </p:nvSpPr>
@@ -4220,7 +4340,7 @@
           <a:p>
             <a:pPr algn="l"/>
             <a:r>
-              <a:rPr sz="1600" b="0">
+              <a:rPr sz="1400" b="0">
                 <a:solidFill>
                   <a:srgbClr val="262262"/>
                 </a:solidFill>
@@ -4267,12 +4387,12 @@
           </a:fontRef>
         </p:style>
         <p:txBody>
-          <a:bodyPr wrap="none" rtlCol="0" anchor="ctr"/>
+          <a:bodyPr rtlCol="0" anchor="ctr" wrap="none"/>
           <a:lstStyle/>
           <a:p>
             <a:pPr algn="ctr"/>
             <a:r>
-              <a:rPr sz="1600" b="1">
+              <a:rPr sz="1400" b="1">
                 <a:solidFill>
                   <a:srgbClr val="FFFFFF"/>
                 </a:solidFill>
@@ -4307,7 +4427,7 @@
           <a:p>
             <a:pPr algn="l"/>
             <a:r>
-              <a:rPr sz="1600" b="0">
+              <a:rPr sz="1400" b="0">
                 <a:solidFill>
                   <a:srgbClr val="262262"/>
                 </a:solidFill>
@@ -4320,7 +4440,7 @@
       </p:sp>
       <p:sp>
         <p:nvSpPr>
-          <p:cNvPr id="41" name="Oval 17"/>
+          <p:cNvPr id="18" name="Oval 17"/>
           <p:cNvSpPr/>
           <p:nvPr/>
         </p:nvSpPr>
@@ -4354,12 +4474,12 @@
           </a:fontRef>
         </p:style>
         <p:txBody>
-          <a:bodyPr wrap="none" rtlCol="0" anchor="ctr"/>
+          <a:bodyPr rtlCol="0" anchor="ctr" wrap="none"/>
           <a:lstStyle/>
           <a:p>
             <a:pPr algn="ctr"/>
             <a:r>
-              <a:rPr sz="1600" b="1">
+              <a:rPr sz="1400" b="1">
                 <a:solidFill>
                   <a:srgbClr val="FFFFFF"/>
                 </a:solidFill>
@@ -4372,7 +4492,7 @@
       </p:sp>
       <p:sp>
         <p:nvSpPr>
-          <p:cNvPr id="42" name="TextBox 18"/>
+          <p:cNvPr id="19" name="TextBox 18"/>
           <p:cNvSpPr txBox="1"/>
           <p:nvPr/>
         </p:nvSpPr>
@@ -4394,7 +4514,7 @@
           <a:p>
             <a:pPr algn="l"/>
             <a:r>
-              <a:rPr sz="1600" b="0">
+              <a:rPr sz="1400" b="0">
                 <a:solidFill>
                   <a:srgbClr val="262262"/>
                 </a:solidFill>
@@ -4407,7 +4527,7 @@
       </p:sp>
       <p:sp>
         <p:nvSpPr>
-          <p:cNvPr id="43" name="Oval 19"/>
+          <p:cNvPr id="20" name="Oval 19"/>
           <p:cNvSpPr/>
           <p:nvPr/>
         </p:nvSpPr>
@@ -4441,12 +4561,12 @@
           </a:fontRef>
         </p:style>
         <p:txBody>
-          <a:bodyPr wrap="none" rtlCol="0" anchor="ctr"/>
+          <a:bodyPr rtlCol="0" anchor="ctr" wrap="none"/>
           <a:lstStyle/>
           <a:p>
             <a:pPr algn="ctr"/>
             <a:r>
-              <a:rPr sz="1600" b="1">
+              <a:rPr sz="1400" b="1">
                 <a:solidFill>
                   <a:srgbClr val="FFFFFF"/>
                 </a:solidFill>
@@ -4481,94 +4601,13 @@
           <a:p>
             <a:pPr algn="l"/>
             <a:r>
-              <a:rPr sz="1600" b="0">
+              <a:rPr sz="1400" b="0">
                 <a:solidFill>
                   <a:srgbClr val="262262"/>
                 </a:solidFill>
                 <a:latin typeface="BIZ UDPGothic"/>
               </a:rPr>
               <a:t>PR diff  →  AIコードレビュー</a:t>
-            </a:r>
-          </a:p>
-        </p:txBody>
-      </p:sp>
-      <p:sp>
-        <p:nvSpPr>
-          <p:cNvPr id="22" name="Rounded Rectangle 21"/>
-          <p:cNvSpPr/>
-          <p:nvPr/>
-        </p:nvSpPr>
-        <p:spPr>
-          <a:xfrm>
-            <a:off x="1005840" y="7863840"/>
-            <a:ext cx="16276320" cy="640080"/>
-          </a:xfrm>
-          <a:prstGeom prst="roundRect">
-            <a:avLst>
-              <a:gd name="adj" fmla="val 5000"/>
-            </a:avLst>
-          </a:prstGeom>
-          <a:solidFill>
-            <a:srgbClr val="F0F4F8"/>
-          </a:solidFill>
-          <a:ln>
-            <a:noFill/>
-          </a:ln>
-        </p:spPr>
-        <p:style>
-          <a:lnRef idx="1">
-            <a:schemeClr val="accent1"/>
-          </a:lnRef>
-          <a:fillRef idx="3">
-            <a:schemeClr val="accent1"/>
-          </a:fillRef>
-          <a:effectRef idx="2">
-            <a:schemeClr val="accent1"/>
-          </a:effectRef>
-          <a:fontRef idx="minor">
-            <a:schemeClr val="lt1"/>
-          </a:fontRef>
-        </p:style>
-        <p:txBody>
-          <a:bodyPr rtlCol="0" anchor="ctr"/>
-          <a:lstStyle/>
-          <a:p>
-            <a:pPr algn="ctr"/>
-            <a:endParaRPr/>
-          </a:p>
-        </p:txBody>
-      </p:sp>
-      <p:sp>
-        <p:nvSpPr>
-          <p:cNvPr id="23" name="TextBox 22"/>
-          <p:cNvSpPr txBox="1"/>
-          <p:nvPr/>
-        </p:nvSpPr>
-        <p:spPr>
-          <a:xfrm>
-            <a:off x="1463040" y="7955280"/>
-            <a:ext cx="15361920" cy="457200"/>
-          </a:xfrm>
-          <a:prstGeom prst="rect">
-            <a:avLst/>
-          </a:prstGeom>
-          <a:noFill/>
-        </p:spPr>
-        <p:txBody>
-          <a:bodyPr wrap="square">
-            <a:spAutoFit/>
-          </a:bodyPr>
-          <a:lstStyle/>
-          <a:p>
-            <a:pPr algn="ctr"/>
-            <a:r>
-              <a:rPr sz="1600" b="0">
-                <a:solidFill>
-                  <a:srgbClr val="64748B"/>
-                </a:solidFill>
-                <a:latin typeface="BIZ UDPGothic"/>
-              </a:rPr>
-              <a:t>全パイプライン共通:  Gemini 2.5 Flash  /  JSON構造化出力  /  Firestore永続化</a:t>
             </a:r>
           </a:p>
         </p:txBody>
